--- a/slides.pptx
+++ b/slides.pptx
@@ -4,6 +4,9 @@
   <p:sldMasterIdLst>
     <p:sldMasterId id="2147483648" r:id="rId1"/>
   </p:sldMasterIdLst>
+  <p:notesMasterIdLst>
+    <p:notesMasterId r:id="rId13"/>
+  </p:notesMasterIdLst>
   <p:sldIdLst>
     <p:sldId id="256" r:id="rId2"/>
     <p:sldId id="257" r:id="rId3"/>
@@ -17,10 +20,7 @@
     <p:sldId id="265" r:id="rId11"/>
     <p:sldId id="266" r:id="rId12"/>
   </p:sldIdLst>
-  <p:notesMasterIdLst>
-    <p:notesMasterId r:id="rId13"/>
-  </p:notesMasterIdLst>
-  <p:sldSz cx="9144000" cy="5143500"/>
+  <p:sldSz cx="9144000" cy="5143500" type="screen16x9"/>
   <p:notesSz cx="5143500" cy="9144000"/>
   <p:defaultTextStyle>
     <a:lvl1pPr marL="0" algn="l" defTabSz="914400" rtl="0" eaLnBrk="1" latinLnBrk="0" hangingPunct="1">
@@ -114,13 +114,20 @@
       </a:defRPr>
     </a:lvl9pPr>
   </p:defaultTextStyle>
+  <p:extLst>
+    <p:ext uri="{EFAFB233-063F-42B5-8137-9DF3F51BA10A}">
+      <p15:sldGuideLst xmlns:p15="http://schemas.microsoft.com/office/powerpoint/2012/main"/>
+    </p:ext>
+  </p:extLst>
 </p:presentation>
 </file>
 
 <file path=ppt/charts/chart1.xml><?xml version="1.0" encoding="utf-8"?>
-<c:chartSpace xmlns:c="http://schemas.openxmlformats.org/drawingml/2006/chart" xmlns:a="http://schemas.openxmlformats.org/drawingml/2006/main" xmlns:r="http://schemas.openxmlformats.org/officeDocument/2006/relationships">
+<c:chartSpace xmlns:c="http://schemas.openxmlformats.org/drawingml/2006/chart" xmlns:a="http://schemas.openxmlformats.org/drawingml/2006/main" xmlns:r="http://schemas.openxmlformats.org/officeDocument/2006/relationships" xmlns:c16r2="http://schemas.microsoft.com/office/drawing/2015/06/chart">
   <c:date1904 val="0"/>
+  <c:lang val="en-US"/>
   <c:roundedCorners val="1"/>
+  <c:style val="2"/>
   <c:chart>
     <c:title>
       <c:tx>
@@ -137,7 +144,7 @@
               </a:defRPr>
             </a:pPr>
             <a:r>
-              <a:rPr sz="1300" b="0" i="0" u="none" strike="noStrike">
+              <a:rPr lang="en-US" sz="1300" b="0" i="0" u="none" strike="noStrike">
                 <a:solidFill>
                   <a:srgbClr val="1E2761"/>
                 </a:solidFill>
@@ -148,7 +155,6 @@
           </a:p>
         </c:rich>
       </c:tx>
-      <c:layout/>
       <c:overlay val="0"/>
     </c:title>
     <c:autoTitleDeleted val="0"/>
@@ -181,18 +187,26 @@
           <c:invertIfNegative val="0"/>
           <c:dLbls>
             <c:numFmt formatCode="#,##0" sourceLinked="0"/>
+            <c:spPr>
+              <a:noFill/>
+              <a:ln>
+                <a:noFill/>
+              </a:ln>
+              <a:effectLst/>
+            </c:spPr>
             <c:txPr>
               <a:bodyPr/>
               <a:lstStyle/>
               <a:p>
                 <a:pPr>
-                  <a:defRPr b="0" i="0" strike="noStrike" sz="1100" u="none">
+                  <a:defRPr sz="1100" b="0" i="0" u="none" strike="noStrike">
                     <a:solidFill>
                       <a:srgbClr val="1A1A2E"/>
                     </a:solidFill>
                     <a:latin typeface="Arial"/>
                   </a:defRPr>
                 </a:pPr>
+                <a:endParaRPr lang="en-US"/>
               </a:p>
             </c:txPr>
             <c:showLegendKey val="0"/>
@@ -202,22 +216,25 @@
             <c:showPercent val="0"/>
             <c:showBubbleSize val="0"/>
             <c:showLeaderLines val="0"/>
+            <c:extLst>
+              <c:ext xmlns:c15="http://schemas.microsoft.com/office/drawing/2012/chart" uri="{CE6537A1-D6FC-4f65-9D91-7224C49458BB}">
+                <c15:showLeaderLines val="0"/>
+              </c:ext>
+            </c:extLst>
           </c:dLbls>
           <c:cat>
-            <c:multiLvlStrRef>
+            <c:strRef>
               <c:f>Sheet1!$A$2:$A$3</c:f>
-              <c:multiLvlStrCache>
+              <c:strCache>
                 <c:ptCount val="2"/>
-                <c:lvl>
-                  <c:pt idx="0">
-                    <c:v>SARIMA</c:v>
-                  </c:pt>
-                  <c:pt idx="1">
-                    <c:v>Prophet</c:v>
-                  </c:pt>
-                </c:lvl>
-              </c:multiLvlStrCache>
-            </c:multiLvlStrRef>
+                <c:pt idx="0">
+                  <c:v>SARIMA</c:v>
+                </c:pt>
+                <c:pt idx="1">
+                  <c:v>Prophet</c:v>
+                </c:pt>
+              </c:strCache>
+            </c:strRef>
           </c:cat>
           <c:val>
             <c:numRef>
@@ -234,6 +251,11 @@
               </c:numCache>
             </c:numRef>
           </c:val>
+          <c:extLst>
+            <c:ext xmlns:c16="http://schemas.microsoft.com/office/drawing/2014/chart" uri="{C3380CC4-5D6E-409C-BE32-E72D297353CC}">
+              <c16:uniqueId val="{00000000-8911-4F5D-B1A2-27F430C98170}"/>
+            </c:ext>
+          </c:extLst>
         </c:ser>
         <c:ser>
           <c:idx val="1"/>
@@ -258,18 +280,26 @@
           <c:invertIfNegative val="0"/>
           <c:dLbls>
             <c:numFmt formatCode="#,##0" sourceLinked="0"/>
+            <c:spPr>
+              <a:noFill/>
+              <a:ln>
+                <a:noFill/>
+              </a:ln>
+              <a:effectLst/>
+            </c:spPr>
             <c:txPr>
               <a:bodyPr/>
               <a:lstStyle/>
               <a:p>
                 <a:pPr>
-                  <a:defRPr b="0" i="0" strike="noStrike" sz="1100" u="none">
+                  <a:defRPr sz="1100" b="0" i="0" u="none" strike="noStrike">
                     <a:solidFill>
                       <a:srgbClr val="1A1A2E"/>
                     </a:solidFill>
                     <a:latin typeface="Arial"/>
                   </a:defRPr>
                 </a:pPr>
+                <a:endParaRPr lang="en-US"/>
               </a:p>
             </c:txPr>
             <c:showLegendKey val="0"/>
@@ -279,22 +309,25 @@
             <c:showPercent val="0"/>
             <c:showBubbleSize val="0"/>
             <c:showLeaderLines val="0"/>
+            <c:extLst>
+              <c:ext xmlns:c15="http://schemas.microsoft.com/office/drawing/2012/chart" uri="{CE6537A1-D6FC-4f65-9D91-7224C49458BB}">
+                <c15:showLeaderLines val="0"/>
+              </c:ext>
+            </c:extLst>
           </c:dLbls>
           <c:cat>
-            <c:multiLvlStrRef>
+            <c:strRef>
               <c:f>Sheet1!$A$2:$A$3</c:f>
-              <c:multiLvlStrCache>
+              <c:strCache>
                 <c:ptCount val="2"/>
-                <c:lvl>
-                  <c:pt idx="0">
-                    <c:v>SARIMA</c:v>
-                  </c:pt>
-                  <c:pt idx="1">
-                    <c:v>Prophet</c:v>
-                  </c:pt>
-                </c:lvl>
-              </c:multiLvlStrCache>
-            </c:multiLvlStrRef>
+                <c:pt idx="0">
+                  <c:v>SARIMA</c:v>
+                </c:pt>
+                <c:pt idx="1">
+                  <c:v>Prophet</c:v>
+                </c:pt>
+              </c:strCache>
+            </c:strRef>
           </c:cat>
           <c:val>
             <c:numRef>
@@ -303,7 +336,7 @@
                 <c:formatCode>General</c:formatCode>
                 <c:ptCount val="2"/>
                 <c:pt idx="0">
-                  <c:v>16.06</c:v>
+                  <c:v>16.059999999999999</c:v>
                 </c:pt>
                 <c:pt idx="1">
                   <c:v>22.16</c:v>
@@ -311,36 +344,23 @@
               </c:numCache>
             </c:numRef>
           </c:val>
+          <c:extLst>
+            <c:ext xmlns:c16="http://schemas.microsoft.com/office/drawing/2014/chart" uri="{C3380CC4-5D6E-409C-BE32-E72D297353CC}">
+              <c16:uniqueId val="{00000001-8911-4F5D-B1A2-27F430C98170}"/>
+            </c:ext>
+          </c:extLst>
         </c:ser>
         <c:dLbls>
-          <c:numFmt formatCode="#,##0" sourceLinked="0"/>
-          <c:txPr>
-            <a:bodyPr/>
-            <a:lstStyle/>
-            <a:p>
-              <a:pPr>
-                <a:defRPr b="0" i="0" strike="noStrike" sz="1100" u="none">
-                  <a:solidFill>
-                    <a:srgbClr val="1A1A2E"/>
-                  </a:solidFill>
-                  <a:latin typeface="Arial"/>
-                </a:defRPr>
-              </a:pPr>
-            </a:p>
-          </c:txPr>
           <c:showLegendKey val="0"/>
           <c:showVal val="1"/>
           <c:showCatName val="0"/>
           <c:showSerName val="0"/>
           <c:showPercent val="0"/>
           <c:showBubbleSize val="0"/>
-          <c:showLeaderLines val="0"/>
         </c:dLbls>
         <c:gapWidth val="150"/>
-        <c:overlap val="0"/>
         <c:axId val="2094734554"/>
         <c:axId val="2094734552"/>
-        <c:axId val="2094734556"/>
       </c:barChart>
       <c:catAx>
         <c:axId val="2094734554"/>
@@ -381,6 +401,7 @@
         <c:crosses val="autoZero"/>
         <c:auto val="1"/>
         <c:lblAlgn val="ctr"/>
+        <c:lblOffset val="100"/>
         <c:noMultiLvlLbl val="1"/>
       </c:catAx>
       <c:valAx>
@@ -461,6 +482,7 @@
     </c:legend>
     <c:plotVisOnly val="1"/>
     <c:dispBlanksAs val="span"/>
+    <c:showDLblsOverMax val="1"/>
   </c:chart>
   <c:spPr>
     <a:solidFill>
@@ -499,234 +521,10 @@
           <a:chExt cx="0" cy="0"/>
         </a:xfrm>
       </p:grpSpPr>
-      <p:sp>
-        <p:nvSpPr>
-          <p:cNvPr id="2" name="Header Placeholder 1"/>
-          <p:cNvSpPr>
-            <a:spLocks noGrp="1"/>
-          </p:cNvSpPr>
-          <p:nvPr>
-            <p:ph type="hdr" sz="quarter"/>
-          </p:nvPr>
-        </p:nvSpPr>
-        <p:spPr>
-          <a:xfrm>
-            <a:off x="0" y="0"/>
-            <a:ext cx="2971800" cy="458788"/>
-          </a:xfrm>
-          <a:prstGeom prst="rect">
-            <a:avLst/>
-          </a:prstGeom>
-        </p:spPr>
-        <p:txBody>
-          <a:bodyPr vert="horz" lIns="91440" tIns="45720" rIns="91440" bIns="45720" rtlCol="0"/>
-          <a:lstStyle>
-            <a:lvl1pPr algn="l">
-              <a:defRPr sz="1200"/>
-            </a:lvl1pPr>
-          </a:lstStyle>
-          <a:p>
-            <a:endParaRPr lang="en-US"/>
-          </a:p>
-        </p:txBody>
-      </p:sp>
-      <p:sp>
-        <p:nvSpPr>
-          <p:cNvPr id="3" name="Date Placeholder 2"/>
-          <p:cNvSpPr>
-            <a:spLocks noGrp="1"/>
-          </p:cNvSpPr>
-          <p:nvPr>
-            <p:ph type="dt" idx="1"/>
-          </p:nvPr>
-        </p:nvSpPr>
-        <p:spPr>
-          <a:xfrm>
-            <a:off x="3884613" y="0"/>
-            <a:ext cx="2971800" cy="458788"/>
-          </a:xfrm>
-          <a:prstGeom prst="rect">
-            <a:avLst/>
-          </a:prstGeom>
-        </p:spPr>
-        <p:txBody>
-          <a:bodyPr vert="horz" lIns="91440" tIns="45720" rIns="91440" bIns="45720" rtlCol="0"/>
-          <a:lstStyle>
-            <a:lvl1pPr algn="r">
-              <a:defRPr sz="1200"/>
-            </a:lvl1pPr>
-          </a:lstStyle>
-          <a:p>
-            <a:fld id="{5282F153-3F37-0F45-9E97-73ACFA13230C}" type="datetimeFigureOut">
-              <a:rPr lang="en-US"/>
-              <a:t>7/23/19</a:t>
-            </a:fld>
-            <a:endParaRPr lang="en-US"/>
-          </a:p>
-        </p:txBody>
-      </p:sp>
-      <p:sp>
-        <p:nvSpPr>
-          <p:cNvPr id="4" name="Slide Image Placeholder 3"/>
-          <p:cNvSpPr>
-            <a:spLocks noGrp="1" noRot="1" noChangeAspect="1"/>
-          </p:cNvSpPr>
-          <p:nvPr>
-            <p:ph type="sldImg" idx="2"/>
-          </p:nvPr>
-        </p:nvSpPr>
-        <p:spPr>
-          <a:xfrm>
-            <a:off x="685800" y="1143000"/>
-            <a:ext cx="5486400" cy="3086100"/>
-          </a:xfrm>
-          <a:prstGeom prst="rect">
-            <a:avLst/>
-          </a:prstGeom>
-          <a:noFill/>
-          <a:ln w="12700">
-            <a:solidFill>
-              <a:prstClr val="black"/>
-            </a:solidFill>
-          </a:ln>
-        </p:spPr>
-        <p:txBody>
-          <a:bodyPr vert="horz" lIns="91440" tIns="45720" rIns="91440" bIns="45720" rtlCol="0" anchor="ctr"/>
-          <a:lstStyle/>
-          <a:p>
-            <a:endParaRPr lang="en-US"/>
-          </a:p>
-        </p:txBody>
-      </p:sp>
-      <p:sp>
-        <p:nvSpPr>
-          <p:cNvPr id="5" name="Notes Placeholder 4"/>
-          <p:cNvSpPr>
-            <a:spLocks noGrp="1"/>
-          </p:cNvSpPr>
-          <p:nvPr>
-            <p:ph type="body" sz="quarter" idx="3"/>
-          </p:nvPr>
-        </p:nvSpPr>
-        <p:spPr>
-          <a:xfrm>
-            <a:off x="685800" y="4400550"/>
-            <a:ext cx="5486400" cy="3600450"/>
-          </a:xfrm>
-          <a:prstGeom prst="rect">
-            <a:avLst/>
-          </a:prstGeom>
-        </p:spPr>
-        <p:txBody>
-          <a:bodyPr vert="horz" lIns="91440" tIns="45720" rIns="91440" bIns="45720" rtlCol="0"/>
-          <a:lstStyle/>
-          <a:p>
-            <a:pPr lvl="0"/>
-            <a:r>
-              <a:rPr lang="en-US"/>
-              <a:t>Click to edit Master text styles</a:t>
-            </a:r>
-          </a:p>
-          <a:p>
-            <a:pPr lvl="1"/>
-            <a:r>
-              <a:rPr lang="en-US"/>
-              <a:t>Second level</a:t>
-            </a:r>
-          </a:p>
-          <a:p>
-            <a:pPr lvl="2"/>
-            <a:r>
-              <a:rPr lang="en-US"/>
-              <a:t>Third level</a:t>
-            </a:r>
-          </a:p>
-          <a:p>
-            <a:pPr lvl="3"/>
-            <a:r>
-              <a:rPr lang="en-US"/>
-              <a:t>Fourth level</a:t>
-            </a:r>
-          </a:p>
-          <a:p>
-            <a:pPr lvl="4"/>
-            <a:r>
-              <a:rPr lang="en-US"/>
-              <a:t>Fifth level</a:t>
-            </a:r>
-          </a:p>
-        </p:txBody>
-      </p:sp>
-      <p:sp>
-        <p:nvSpPr>
-          <p:cNvPr id="6" name="Footer Placeholder 5"/>
-          <p:cNvSpPr>
-            <a:spLocks noGrp="1"/>
-          </p:cNvSpPr>
-          <p:nvPr>
-            <p:ph type="ftr" sz="quarter" idx="4"/>
-          </p:nvPr>
-        </p:nvSpPr>
-        <p:spPr>
-          <a:xfrm>
-            <a:off x="0" y="8685213"/>
-            <a:ext cx="2971800" cy="458787"/>
-          </a:xfrm>
-          <a:prstGeom prst="rect">
-            <a:avLst/>
-          </a:prstGeom>
-        </p:spPr>
-        <p:txBody>
-          <a:bodyPr vert="horz" lIns="91440" tIns="45720" rIns="91440" bIns="45720" rtlCol="0" anchor="b"/>
-          <a:lstStyle>
-            <a:lvl1pPr algn="l">
-              <a:defRPr sz="1200"/>
-            </a:lvl1pPr>
-          </a:lstStyle>
-          <a:p>
-            <a:endParaRPr lang="en-US"/>
-          </a:p>
-        </p:txBody>
-      </p:sp>
-      <p:sp>
-        <p:nvSpPr>
-          <p:cNvPr id="7" name="Slide Number Placeholder 6"/>
-          <p:cNvSpPr>
-            <a:spLocks noGrp="1"/>
-          </p:cNvSpPr>
-          <p:nvPr>
-            <p:ph type="sldNum" sz="quarter" idx="5"/>
-          </p:nvPr>
-        </p:nvSpPr>
-        <p:spPr>
-          <a:xfrm>
-            <a:off x="3884613" y="8685213"/>
-            <a:ext cx="2971800" cy="458787"/>
-          </a:xfrm>
-          <a:prstGeom prst="rect">
-            <a:avLst/>
-          </a:prstGeom>
-        </p:spPr>
-        <p:txBody>
-          <a:bodyPr vert="horz" lIns="91440" tIns="45720" rIns="91440" bIns="45720" rtlCol="0" anchor="b"/>
-          <a:lstStyle>
-            <a:lvl1pPr algn="r">
-              <a:defRPr sz="1200"/>
-            </a:lvl1pPr>
-          </a:lstStyle>
-          <a:p>
-            <a:fld id="{CE5E9CC1-C706-0F49-92D6-E571CC5EEA8F}" type="slidenum">
-              <a:rPr lang="en-US"/>
-              <a:t>‹#›</a:t>
-            </a:fld>
-            <a:endParaRPr lang="en-US"/>
-          </a:p>
-        </p:txBody>
-      </p:sp>
     </p:spTree>
     <p:extLst>
       <p:ext uri="{BB962C8B-B14F-4D97-AF65-F5344CB8AC3E}">
-        <p14:creationId xmlns:p14="http://schemas.microsoft.com/office/powerpoint/2010/main" val="1024086991"/>
+        <p14:creationId xmlns:p14="http://schemas.microsoft.com/office/powerpoint/2010/main" val="1914965068"/>
       </p:ext>
     </p:extLst>
   </p:cSld>
@@ -870,10 +668,6 @@
           <a:bodyPr/>
           <a:lstStyle/>
           <a:p>
-            <a:r>
-              <a:rPr lang="en-US" dirty="0"/>
-              <a:t/>
-            </a:r>
             <a:endParaRPr lang="en-US" dirty="0"/>
           </a:p>
         </p:txBody>
@@ -958,10 +752,6 @@
           <a:bodyPr/>
           <a:lstStyle/>
           <a:p>
-            <a:r>
-              <a:rPr lang="en-US" dirty="0"/>
-              <a:t/>
-            </a:r>
             <a:endParaRPr lang="en-US" dirty="0"/>
           </a:p>
         </p:txBody>
@@ -1046,10 +836,6 @@
           <a:bodyPr/>
           <a:lstStyle/>
           <a:p>
-            <a:r>
-              <a:rPr lang="en-US" dirty="0"/>
-              <a:t/>
-            </a:r>
             <a:endParaRPr lang="en-US" dirty="0"/>
           </a:p>
         </p:txBody>
@@ -1134,10 +920,6 @@
           <a:bodyPr/>
           <a:lstStyle/>
           <a:p>
-            <a:r>
-              <a:rPr lang="en-US" dirty="0"/>
-              <a:t/>
-            </a:r>
             <a:endParaRPr lang="en-US" dirty="0"/>
           </a:p>
         </p:txBody>
@@ -1222,10 +1004,6 @@
           <a:bodyPr/>
           <a:lstStyle/>
           <a:p>
-            <a:r>
-              <a:rPr lang="en-US" dirty="0"/>
-              <a:t/>
-            </a:r>
             <a:endParaRPr lang="en-US" dirty="0"/>
           </a:p>
         </p:txBody>
@@ -1310,10 +1088,6 @@
           <a:bodyPr/>
           <a:lstStyle/>
           <a:p>
-            <a:r>
-              <a:rPr lang="en-US" dirty="0"/>
-              <a:t/>
-            </a:r>
             <a:endParaRPr lang="en-US" dirty="0"/>
           </a:p>
         </p:txBody>
@@ -1398,10 +1172,6 @@
           <a:bodyPr/>
           <a:lstStyle/>
           <a:p>
-            <a:r>
-              <a:rPr lang="en-US" dirty="0"/>
-              <a:t/>
-            </a:r>
             <a:endParaRPr lang="en-US" dirty="0"/>
           </a:p>
         </p:txBody>
@@ -1486,10 +1256,6 @@
           <a:bodyPr/>
           <a:lstStyle/>
           <a:p>
-            <a:r>
-              <a:rPr lang="en-US" dirty="0"/>
-              <a:t/>
-            </a:r>
             <a:endParaRPr lang="en-US" dirty="0"/>
           </a:p>
         </p:txBody>
@@ -1574,10 +1340,6 @@
           <a:bodyPr/>
           <a:lstStyle/>
           <a:p>
-            <a:r>
-              <a:rPr lang="en-US" dirty="0"/>
-              <a:t/>
-            </a:r>
             <a:endParaRPr lang="en-US" dirty="0"/>
           </a:p>
         </p:txBody>
@@ -1662,10 +1424,6 @@
           <a:bodyPr/>
           <a:lstStyle/>
           <a:p>
-            <a:r>
-              <a:rPr lang="en-US" dirty="0"/>
-              <a:t/>
-            </a:r>
             <a:endParaRPr lang="en-US" dirty="0"/>
           </a:p>
         </p:txBody>
@@ -1750,10 +1508,6 @@
           <a:bodyPr/>
           <a:lstStyle/>
           <a:p>
-            <a:r>
-              <a:rPr lang="en-US" dirty="0"/>
-              <a:t/>
-            </a:r>
             <a:endParaRPr lang="en-US" dirty="0"/>
           </a:p>
         </p:txBody>
@@ -1827,6 +1581,11 @@
 <file path=ppt/slideMasters/slideMaster1.xml><?xml version="1.0" encoding="utf-8"?>
 <p:sldMaster xmlns:a="http://schemas.openxmlformats.org/drawingml/2006/main" xmlns:r="http://schemas.openxmlformats.org/officeDocument/2006/relationships" xmlns:p="http://schemas.openxmlformats.org/presentationml/2006/main">
   <p:cSld>
+    <p:bg>
+      <p:bgRef idx="1001">
+        <a:schemeClr val="bg1"/>
+      </p:bgRef>
+    </p:bg>
     <p:spTree>
       <p:nvGrpSpPr>
         <p:cNvPr id="1" name=""/>
@@ -2109,6 +1868,7 @@
         <a:solidFill>
           <a:srgbClr val="1E2761"/>
         </a:solidFill>
+        <a:effectLst/>
       </p:bgPr>
     </p:bg>
     <p:spTree>
@@ -2146,7 +1906,7 @@
           <a:bodyPr wrap="square" lIns="0" tIns="0" rIns="0" bIns="0" rtlCol="0" anchor="ctr"/>
           <a:lstStyle/>
           <a:p>
-            <a:pPr indent="0" marL="0">
+            <a:pPr marL="0" indent="0">
               <a:buNone/>
             </a:pPr>
             <a:r>
@@ -2185,7 +1945,7 @@
           <a:bodyPr wrap="square" lIns="0" tIns="0" rIns="0" bIns="0" rtlCol="0" anchor="ctr"/>
           <a:lstStyle/>
           <a:p>
-            <a:pPr indent="0" marL="0">
+            <a:pPr marL="0" indent="0">
               <a:buNone/>
             </a:pPr>
             <a:r>
@@ -2224,7 +1984,7 @@
           <a:bodyPr wrap="square" lIns="0" tIns="0" rIns="0" bIns="0" rtlCol="0" anchor="ctr"/>
           <a:lstStyle/>
           <a:p>
-            <a:pPr indent="0" marL="0">
+            <a:pPr marL="0" indent="0">
               <a:buNone/>
             </a:pPr>
             <a:r>
@@ -2241,7 +2001,7 @@
             <a:endParaRPr lang="en-US" sz="1400" dirty="0"/>
           </a:p>
           <a:p>
-            <a:pPr indent="0" marL="0">
+            <a:pPr marL="0" indent="0">
               <a:buNone/>
             </a:pPr>
             <a:r>
@@ -2257,59 +2017,42 @@
             </a:r>
             <a:endParaRPr lang="en-US" sz="1400" dirty="0"/>
           </a:p>
-          <a:p>
-            <a:pPr indent="0" marL="0">
-              <a:buNone/>
-            </a:pPr>
-            <a:r>
-              <a:rPr lang="en-US" sz="1400" dirty="0">
-                <a:solidFill>
-                  <a:srgbClr val="9FB4E8"/>
+        </p:txBody>
+      </p:sp>
+      <p:sp>
+        <p:nvSpPr>
+          <p:cNvPr id="5" name="Text 3"/>
+          <p:cNvSpPr/>
+          <p:nvPr/>
+        </p:nvSpPr>
+        <p:spPr>
+          <a:xfrm>
+            <a:off x="640080" y="4297680"/>
+            <a:ext cx="7863840" cy="365760"/>
+          </a:xfrm>
+          <a:prstGeom prst="rect">
+            <a:avLst/>
+          </a:prstGeom>
+          <a:noFill/>
+          <a:ln/>
+        </p:spPr>
+        <p:txBody>
+          <a:bodyPr wrap="square" lIns="0" tIns="0" rIns="0" bIns="0" rtlCol="0" anchor="ctr"/>
+          <a:lstStyle/>
+          <a:p>
+            <a:pPr marL="0" indent="0">
+              <a:buNone/>
+            </a:pPr>
+            <a:r>
+              <a:rPr lang="en-US" sz="1300" i="1" dirty="0">
+                <a:solidFill>
+                  <a:srgbClr val="CADCFC"/>
                 </a:solidFill>
                 <a:latin typeface="Calibri" pitchFamily="34" charset="0"/>
                 <a:ea typeface="Calibri" pitchFamily="34" charset="-122"/>
                 <a:cs typeface="Calibri" pitchFamily="34" charset="-120"/>
               </a:rPr>
-              <a:t>Time Series Analysis — Group Project</a:t>
-            </a:r>
-            <a:endParaRPr lang="en-US" sz="1400" dirty="0"/>
-          </a:p>
-        </p:txBody>
-      </p:sp>
-      <p:sp>
-        <p:nvSpPr>
-          <p:cNvPr id="5" name="Text 3"/>
-          <p:cNvSpPr/>
-          <p:nvPr/>
-        </p:nvSpPr>
-        <p:spPr>
-          <a:xfrm>
-            <a:off x="640080" y="4297680"/>
-            <a:ext cx="7863840" cy="365760"/>
-          </a:xfrm>
-          <a:prstGeom prst="rect">
-            <a:avLst/>
-          </a:prstGeom>
-          <a:noFill/>
-          <a:ln/>
-        </p:spPr>
-        <p:txBody>
-          <a:bodyPr wrap="square" lIns="0" tIns="0" rIns="0" bIns="0" rtlCol="0" anchor="ctr"/>
-          <a:lstStyle/>
-          <a:p>
-            <a:pPr indent="0" marL="0">
-              <a:buNone/>
-            </a:pPr>
-            <a:r>
-              <a:rPr lang="en-US" sz="1300" i="1" dirty="0">
-                <a:solidFill>
-                  <a:srgbClr val="CADCFC"/>
-                </a:solidFill>
-                <a:latin typeface="Calibri" pitchFamily="34" charset="0"/>
-                <a:ea typeface="Calibri" pitchFamily="34" charset="-122"/>
-                <a:cs typeface="Calibri" pitchFamily="34" charset="-120"/>
-              </a:rPr>
-              <a:t>Team: [Member 1] · [Member 2] · [Member 3] · [Member 4]</a:t>
+              <a:t>Team: Aymane Zeroual · Otmane ZAIM· Omar Tanji </a:t>
             </a:r>
             <a:endParaRPr lang="en-US" sz="1300" dirty="0"/>
           </a:p>
@@ -2331,6 +2074,7 @@
         <a:solidFill>
           <a:srgbClr val="FFFFFF"/>
         </a:solidFill>
+        <a:effectLst/>
       </p:bgPr>
     </p:bg>
     <p:spTree>
@@ -2368,7 +2112,7 @@
           <a:bodyPr wrap="square" lIns="0" tIns="0" rIns="0" bIns="0" rtlCol="0" anchor="ctr"/>
           <a:lstStyle/>
           <a:p>
-            <a:pPr indent="0" marL="0">
+            <a:pPr marL="0" indent="0">
               <a:buNone/>
             </a:pPr>
             <a:r>
@@ -2405,6 +2149,13 @@
           </a:solidFill>
           <a:ln/>
         </p:spPr>
+        <p:txBody>
+          <a:bodyPr/>
+          <a:lstStyle/>
+          <a:p>
+            <a:endParaRPr lang="en-US"/>
+          </a:p>
+        </p:txBody>
       </p:sp>
       <p:sp>
         <p:nvSpPr>
@@ -2427,7 +2178,7 @@
           <a:bodyPr wrap="square" lIns="0" tIns="0" rIns="0" bIns="0" rtlCol="0" anchor="ctr"/>
           <a:lstStyle/>
           <a:p>
-            <a:pPr algn="ctr" indent="0" marL="0">
+            <a:pPr marL="0" indent="0" algn="ctr">
               <a:buNone/>
             </a:pPr>
             <a:r>
@@ -2466,7 +2217,7 @@
           <a:bodyPr wrap="square" lIns="0" tIns="0" rIns="0" bIns="0" rtlCol="0" anchor="t"/>
           <a:lstStyle/>
           <a:p>
-            <a:pPr indent="0" marL="0">
+            <a:pPr marL="0" indent="0">
               <a:buNone/>
             </a:pPr>
             <a:r>
@@ -2483,7 +2234,7 @@
             <a:endParaRPr lang="en-US" sz="1450" dirty="0"/>
           </a:p>
           <a:p>
-            <a:pPr indent="0" marL="0">
+            <a:pPr marL="0" indent="0">
               <a:buNone/>
             </a:pPr>
             <a:r>
@@ -2520,6 +2271,13 @@
           </a:solidFill>
           <a:ln/>
         </p:spPr>
+        <p:txBody>
+          <a:bodyPr/>
+          <a:lstStyle/>
+          <a:p>
+            <a:endParaRPr lang="en-US"/>
+          </a:p>
+        </p:txBody>
       </p:sp>
       <p:sp>
         <p:nvSpPr>
@@ -2542,7 +2300,7 @@
           <a:bodyPr wrap="square" lIns="0" tIns="0" rIns="0" bIns="0" rtlCol="0" anchor="ctr"/>
           <a:lstStyle/>
           <a:p>
-            <a:pPr algn="ctr" indent="0" marL="0">
+            <a:pPr marL="0" indent="0" algn="ctr">
               <a:buNone/>
             </a:pPr>
             <a:r>
@@ -2581,7 +2339,7 @@
           <a:bodyPr wrap="square" lIns="0" tIns="0" rIns="0" bIns="0" rtlCol="0" anchor="t"/>
           <a:lstStyle/>
           <a:p>
-            <a:pPr indent="0" marL="0">
+            <a:pPr marL="0" indent="0">
               <a:buNone/>
             </a:pPr>
             <a:r>
@@ -2598,7 +2356,7 @@
             <a:endParaRPr lang="en-US" sz="1450" dirty="0"/>
           </a:p>
           <a:p>
-            <a:pPr indent="0" marL="0">
+            <a:pPr marL="0" indent="0">
               <a:buNone/>
             </a:pPr>
             <a:r>
@@ -2635,6 +2393,13 @@
           </a:solidFill>
           <a:ln/>
         </p:spPr>
+        <p:txBody>
+          <a:bodyPr/>
+          <a:lstStyle/>
+          <a:p>
+            <a:endParaRPr lang="en-US"/>
+          </a:p>
+        </p:txBody>
       </p:sp>
       <p:sp>
         <p:nvSpPr>
@@ -2657,7 +2422,7 @@
           <a:bodyPr wrap="square" lIns="0" tIns="0" rIns="0" bIns="0" rtlCol="0" anchor="ctr"/>
           <a:lstStyle/>
           <a:p>
-            <a:pPr algn="ctr" indent="0" marL="0">
+            <a:pPr marL="0" indent="0" algn="ctr">
               <a:buNone/>
             </a:pPr>
             <a:r>
@@ -2696,7 +2461,7 @@
           <a:bodyPr wrap="square" lIns="0" tIns="0" rIns="0" bIns="0" rtlCol="0" anchor="t"/>
           <a:lstStyle/>
           <a:p>
-            <a:pPr indent="0" marL="0">
+            <a:pPr marL="0" indent="0">
               <a:buNone/>
             </a:pPr>
             <a:r>
@@ -2713,7 +2478,7 @@
             <a:endParaRPr lang="en-US" sz="1450" dirty="0"/>
           </a:p>
           <a:p>
-            <a:pPr indent="0" marL="0">
+            <a:pPr marL="0" indent="0">
               <a:buNone/>
             </a:pPr>
             <a:r>
@@ -2725,7 +2490,29 @@
                 <a:ea typeface="Calibri" pitchFamily="34" charset="-122"/>
                 <a:cs typeface="Calibri" pitchFamily="34" charset="-120"/>
               </a:rPr>
-              <a:t>Single methods are noisy (z-score: 99 flags) — agreement of ≥2 of 4 methods yields 20 precise, fully explainable events.</a:t>
+              <a:t>Single methods are noisy (z-score: 99 </a:t>
+            </a:r>
+            <a:r>
+              <a:rPr lang="en-US" sz="1150">
+                <a:solidFill>
+                  <a:srgbClr val="1A1A2E"/>
+                </a:solidFill>
+                <a:latin typeface="Calibri" pitchFamily="34" charset="0"/>
+                <a:ea typeface="Calibri" pitchFamily="34" charset="-122"/>
+                <a:cs typeface="Calibri" pitchFamily="34" charset="-120"/>
+              </a:rPr>
+              <a:t>flags): agreement </a:t>
+            </a:r>
+            <a:r>
+              <a:rPr lang="en-US" sz="1150" dirty="0">
+                <a:solidFill>
+                  <a:srgbClr val="1A1A2E"/>
+                </a:solidFill>
+                <a:latin typeface="Calibri" pitchFamily="34" charset="0"/>
+                <a:ea typeface="Calibri" pitchFamily="34" charset="-122"/>
+                <a:cs typeface="Calibri" pitchFamily="34" charset="-120"/>
+              </a:rPr>
+              <a:t>of ≥2 of 4 methods yields 20 precise, fully explainable events.</a:t>
             </a:r>
             <a:endParaRPr lang="en-US" sz="1450" dirty="0"/>
           </a:p>
@@ -2750,6 +2537,13 @@
           </a:solidFill>
           <a:ln/>
         </p:spPr>
+        <p:txBody>
+          <a:bodyPr/>
+          <a:lstStyle/>
+          <a:p>
+            <a:endParaRPr lang="en-US"/>
+          </a:p>
+        </p:txBody>
       </p:sp>
       <p:sp>
         <p:nvSpPr>
@@ -2772,7 +2566,7 @@
           <a:bodyPr wrap="square" lIns="0" tIns="0" rIns="0" bIns="0" rtlCol="0" anchor="ctr"/>
           <a:lstStyle/>
           <a:p>
-            <a:pPr algn="ctr" indent="0" marL="0">
+            <a:pPr marL="0" indent="0" algn="ctr">
               <a:buNone/>
             </a:pPr>
             <a:r>
@@ -2811,7 +2605,7 @@
           <a:bodyPr wrap="square" lIns="0" tIns="0" rIns="0" bIns="0" rtlCol="0" anchor="t"/>
           <a:lstStyle/>
           <a:p>
-            <a:pPr indent="0" marL="0">
+            <a:pPr marL="0" indent="0">
               <a:buNone/>
             </a:pPr>
             <a:r>
@@ -2828,7 +2622,7 @@
             <a:endParaRPr lang="en-US" sz="1450" dirty="0"/>
           </a:p>
           <a:p>
-            <a:pPr indent="0" marL="0">
+            <a:pPr marL="0" indent="0">
               <a:buNone/>
             </a:pPr>
             <a:r>
@@ -2867,7 +2661,7 @@
           <a:bodyPr wrap="square" rtlCol="0" anchor="ctr"/>
           <a:lstStyle/>
           <a:p>
-            <a:pPr algn="r" indent="0" marL="0">
+            <a:pPr marL="0" indent="0" algn="r">
               <a:buNone/>
             </a:pPr>
             <a:r>
@@ -2901,6 +2695,7 @@
         <a:solidFill>
           <a:srgbClr val="1E2761"/>
         </a:solidFill>
+        <a:effectLst/>
       </p:bgPr>
     </p:bg>
     <p:spTree>
@@ -2925,8 +2720,8 @@
         </p:nvSpPr>
         <p:spPr>
           <a:xfrm>
-            <a:off x="640080" y="1554480"/>
-            <a:ext cx="7863840" cy="731520"/>
+            <a:off x="3318104" y="2103120"/>
+            <a:ext cx="2507791" cy="731520"/>
           </a:xfrm>
           <a:prstGeom prst="rect">
             <a:avLst/>
@@ -2938,7 +2733,7 @@
           <a:bodyPr wrap="square" lIns="0" tIns="0" rIns="0" bIns="0" rtlCol="0" anchor="ctr"/>
           <a:lstStyle/>
           <a:p>
-            <a:pPr indent="0" marL="0">
+            <a:pPr marL="0" indent="0">
               <a:buNone/>
             </a:pPr>
             <a:r>
@@ -2977,56 +2772,11 @@
           <a:bodyPr wrap="square" lIns="0" tIns="0" rIns="0" bIns="0" rtlCol="0" anchor="ctr"/>
           <a:lstStyle/>
           <a:p>
-            <a:pPr indent="0" marL="0">
-              <a:buNone/>
-            </a:pPr>
-            <a:r>
-              <a:rPr lang="en-US" sz="1400" dirty="0">
-                <a:solidFill>
-                  <a:srgbClr val="CADCFC"/>
-                </a:solidFill>
-                <a:latin typeface="Calibri" pitchFamily="34" charset="0"/>
-                <a:ea typeface="Calibri" pitchFamily="34" charset="-122"/>
-                <a:cs typeface="Calibri" pitchFamily="34" charset="-120"/>
-              </a:rPr>
-              <a:t>Full analysis: web_traffic_forecasting.ipynb  (GitHub repository)</a:t>
-            </a:r>
+            <a:pPr marL="0" indent="0">
+              <a:buNone/>
+            </a:pPr>
             <a:endParaRPr lang="en-US" sz="1400" dirty="0"/>
           </a:p>
-          <a:p>
-            <a:pPr indent="0" marL="0">
-              <a:buNone/>
-            </a:pPr>
-            <a:r>
-              <a:rPr lang="en-US" sz="1400" dirty="0">
-                <a:solidFill>
-                  <a:srgbClr val="CADCFC"/>
-                </a:solidFill>
-                <a:latin typeface="Calibri" pitchFamily="34" charset="0"/>
-                <a:ea typeface="Calibri" pitchFamily="34" charset="-122"/>
-                <a:cs typeface="Calibri" pitchFamily="34" charset="-120"/>
-              </a:rPr>
-              <a:t>Workflow: exploration → decomposition → SARIMA/Prophet → 4-method anomaly detection → re-forecast</a:t>
-            </a:r>
-            <a:endParaRPr lang="en-US" sz="1400" dirty="0"/>
-          </a:p>
-          <a:p>
-            <a:pPr indent="0" marL="0">
-              <a:buNone/>
-            </a:pPr>
-            <a:r>
-              <a:rPr lang="en-US" sz="1400" dirty="0">
-                <a:solidFill>
-                  <a:srgbClr val="CADCFC"/>
-                </a:solidFill>
-                <a:latin typeface="Calibri" pitchFamily="34" charset="0"/>
-                <a:ea typeface="Calibri" pitchFamily="34" charset="-122"/>
-                <a:cs typeface="Calibri" pitchFamily="34" charset="-120"/>
-              </a:rPr>
-              <a:t>Dataset: Kaggle Web Traffic Time Series Forecasting</a:t>
-            </a:r>
-            <a:endParaRPr lang="en-US" sz="1400" dirty="0"/>
-          </a:p>
         </p:txBody>
       </p:sp>
       <p:sp>
@@ -3037,8 +2787,8 @@
         </p:nvSpPr>
         <p:spPr>
           <a:xfrm>
-            <a:off x="640080" y="3931920"/>
-            <a:ext cx="7863840" cy="457200"/>
+            <a:off x="4107018" y="2855068"/>
+            <a:ext cx="1406620" cy="457200"/>
           </a:xfrm>
           <a:prstGeom prst="rect">
             <a:avLst/>
@@ -3050,7 +2800,7 @@
           <a:bodyPr wrap="square" lIns="0" tIns="0" rIns="0" bIns="0" rtlCol="0" anchor="ctr"/>
           <a:lstStyle/>
           <a:p>
-            <a:pPr indent="0" marL="0">
+            <a:pPr marL="0" indent="0">
               <a:buNone/>
             </a:pPr>
             <a:r>
@@ -3084,6 +2834,7 @@
         <a:solidFill>
           <a:srgbClr val="FFFFFF"/>
         </a:solidFill>
+        <a:effectLst/>
       </p:bgPr>
     </p:bg>
     <p:spTree>
@@ -3121,7 +2872,7 @@
           <a:bodyPr wrap="square" lIns="0" tIns="0" rIns="0" bIns="0" rtlCol="0" anchor="ctr"/>
           <a:lstStyle/>
           <a:p>
-            <a:pPr indent="0" marL="0">
+            <a:pPr marL="0" indent="0">
               <a:buNone/>
             </a:pPr>
             <a:r>
@@ -3160,7 +2911,7 @@
           <a:bodyPr wrap="square" lIns="0" tIns="0" rIns="0" bIns="0" rtlCol="0" anchor="ctr"/>
           <a:lstStyle/>
           <a:p>
-            <a:pPr indent="0" marL="0">
+            <a:pPr marL="0" indent="0">
               <a:buNone/>
             </a:pPr>
             <a:r>
@@ -3199,13 +2950,20 @@
           </a:solidFill>
           <a:ln/>
           <a:effectLst>
-            <a:outerShdw sx="100000" sy="100000" kx="0" ky="0" algn="bl" rotWithShape="0" blurRad="76200" dist="25400" dir="2700000">
+            <a:outerShdw blurRad="76200" dist="25400" dir="2700000" algn="bl" rotWithShape="0">
               <a:srgbClr val="000000">
                 <a:alpha val="13000"/>
               </a:srgbClr>
             </a:outerShdw>
           </a:effectLst>
         </p:spPr>
+        <p:txBody>
+          <a:bodyPr/>
+          <a:lstStyle/>
+          <a:p>
+            <a:endParaRPr lang="en-US"/>
+          </a:p>
+        </p:txBody>
       </p:sp>
       <p:sp>
         <p:nvSpPr>
@@ -3228,7 +2986,7 @@
           <a:bodyPr wrap="square" lIns="0" tIns="0" rIns="0" bIns="0" rtlCol="0" anchor="ctr"/>
           <a:lstStyle/>
           <a:p>
-            <a:pPr algn="ctr" indent="0" marL="0">
+            <a:pPr marL="0" indent="0" algn="ctr">
               <a:buNone/>
             </a:pPr>
             <a:r>
@@ -3267,7 +3025,7 @@
           <a:bodyPr wrap="square" lIns="0" tIns="0" rIns="0" bIns="0" rtlCol="0" anchor="ctr"/>
           <a:lstStyle/>
           <a:p>
-            <a:pPr algn="ctr" indent="0" marL="0">
+            <a:pPr marL="0" indent="0" algn="ctr">
               <a:buNone/>
             </a:pPr>
             <a:r>
@@ -3306,13 +3064,20 @@
           </a:solidFill>
           <a:ln/>
           <a:effectLst>
-            <a:outerShdw sx="100000" sy="100000" kx="0" ky="0" algn="bl" rotWithShape="0" blurRad="76200" dist="25400" dir="2700000">
+            <a:outerShdw blurRad="76200" dist="25400" dir="2700000" algn="bl" rotWithShape="0">
               <a:srgbClr val="000000">
                 <a:alpha val="13000"/>
               </a:srgbClr>
             </a:outerShdw>
           </a:effectLst>
         </p:spPr>
+        <p:txBody>
+          <a:bodyPr/>
+          <a:lstStyle/>
+          <a:p>
+            <a:endParaRPr lang="en-US"/>
+          </a:p>
+        </p:txBody>
       </p:sp>
       <p:sp>
         <p:nvSpPr>
@@ -3335,7 +3100,7 @@
           <a:bodyPr wrap="square" lIns="0" tIns="0" rIns="0" bIns="0" rtlCol="0" anchor="ctr"/>
           <a:lstStyle/>
           <a:p>
-            <a:pPr algn="ctr" indent="0" marL="0">
+            <a:pPr marL="0" indent="0" algn="ctr">
               <a:buNone/>
             </a:pPr>
             <a:r>
@@ -3374,7 +3139,7 @@
           <a:bodyPr wrap="square" lIns="0" tIns="0" rIns="0" bIns="0" rtlCol="0" anchor="ctr"/>
           <a:lstStyle/>
           <a:p>
-            <a:pPr algn="ctr" indent="0" marL="0">
+            <a:pPr marL="0" indent="0" algn="ctr">
               <a:buNone/>
             </a:pPr>
             <a:r>
@@ -3413,13 +3178,20 @@
           </a:solidFill>
           <a:ln/>
           <a:effectLst>
-            <a:outerShdw sx="100000" sy="100000" kx="0" ky="0" algn="bl" rotWithShape="0" blurRad="76200" dist="25400" dir="2700000">
+            <a:outerShdw blurRad="76200" dist="25400" dir="2700000" algn="bl" rotWithShape="0">
               <a:srgbClr val="000000">
                 <a:alpha val="13000"/>
               </a:srgbClr>
             </a:outerShdw>
           </a:effectLst>
         </p:spPr>
+        <p:txBody>
+          <a:bodyPr/>
+          <a:lstStyle/>
+          <a:p>
+            <a:endParaRPr lang="en-US"/>
+          </a:p>
+        </p:txBody>
       </p:sp>
       <p:sp>
         <p:nvSpPr>
@@ -3442,7 +3214,7 @@
           <a:bodyPr wrap="square" lIns="0" tIns="0" rIns="0" bIns="0" rtlCol="0" anchor="ctr"/>
           <a:lstStyle/>
           <a:p>
-            <a:pPr algn="ctr" indent="0" marL="0">
+            <a:pPr marL="0" indent="0" algn="ctr">
               <a:buNone/>
             </a:pPr>
             <a:r>
@@ -3481,7 +3253,7 @@
           <a:bodyPr wrap="square" lIns="0" tIns="0" rIns="0" bIns="0" rtlCol="0" anchor="ctr"/>
           <a:lstStyle/>
           <a:p>
-            <a:pPr algn="ctr" indent="0" marL="0">
+            <a:pPr marL="0" indent="0" algn="ctr">
               <a:buNone/>
             </a:pPr>
             <a:r>
@@ -3520,13 +3292,20 @@
           </a:solidFill>
           <a:ln/>
           <a:effectLst>
-            <a:outerShdw sx="100000" sy="100000" kx="0" ky="0" algn="bl" rotWithShape="0" blurRad="76200" dist="25400" dir="2700000">
+            <a:outerShdw blurRad="76200" dist="25400" dir="2700000" algn="bl" rotWithShape="0">
               <a:srgbClr val="000000">
                 <a:alpha val="13000"/>
               </a:srgbClr>
             </a:outerShdw>
           </a:effectLst>
         </p:spPr>
+        <p:txBody>
+          <a:bodyPr/>
+          <a:lstStyle/>
+          <a:p>
+            <a:endParaRPr lang="en-US"/>
+          </a:p>
+        </p:txBody>
       </p:sp>
       <p:sp>
         <p:nvSpPr>
@@ -3549,7 +3328,7 @@
           <a:bodyPr wrap="square" lIns="0" tIns="0" rIns="0" bIns="0" rtlCol="0" anchor="ctr"/>
           <a:lstStyle/>
           <a:p>
-            <a:pPr algn="ctr" indent="0" marL="0">
+            <a:pPr marL="0" indent="0" algn="ctr">
               <a:buNone/>
             </a:pPr>
             <a:r>
@@ -3588,7 +3367,7 @@
           <a:bodyPr wrap="square" lIns="0" tIns="0" rIns="0" bIns="0" rtlCol="0" anchor="ctr"/>
           <a:lstStyle/>
           <a:p>
-            <a:pPr algn="ctr" indent="0" marL="0">
+            <a:pPr marL="0" indent="0" algn="ctr">
               <a:buNone/>
             </a:pPr>
             <a:r>
@@ -3608,14 +3387,14 @@
       </p:sp>
       <p:pic>
         <p:nvPicPr>
-          <p:cNvPr id="16" name="Image 0" descr="/sessions/relaxed-magical-maxwell/mnt/outputs/figs/01_series.png">    </p:cNvPr>
+          <p:cNvPr id="16" name="Image 0" descr="/sessions/relaxed-magical-maxwell/mnt/outputs/figs/01_series.png"/>
           <p:cNvPicPr>
             <a:picLocks noChangeAspect="1"/>
           </p:cNvPicPr>
           <p:nvPr/>
         </p:nvPicPr>
         <p:blipFill>
-          <a:blip r:embed="rId1"/>
+          <a:blip r:embed="rId3"/>
           <a:stretch>
             <a:fillRect/>
           </a:stretch>
@@ -3651,7 +3430,7 @@
           <a:bodyPr wrap="square" lIns="0" tIns="0" rIns="0" bIns="0" rtlCol="0" anchor="t"/>
           <a:lstStyle/>
           <a:p>
-            <a:pPr indent="0" marL="0">
+            <a:pPr marL="0" indent="0">
               <a:buNone/>
             </a:pPr>
             <a:r>
@@ -3668,7 +3447,7 @@
             <a:endParaRPr lang="en-US" sz="1100" dirty="0"/>
           </a:p>
           <a:p>
-            <a:pPr indent="0" marL="0">
+            <a:pPr marL="0" indent="0">
               <a:buNone/>
             </a:pPr>
             <a:r>
@@ -3680,12 +3459,12 @@
                 <a:ea typeface="Calibri" pitchFamily="34" charset="-122"/>
                 <a:cs typeface="Calibri" pitchFamily="34" charset="-120"/>
               </a:rPr>
-              <a:t>Individual pages are sparse and noisy. Summing all pages gives one dense series with strong structure — ideal for SARIMA, Prophet and decomposition.</a:t>
+              <a:t>Individual pages are sparse and noisy. Summing all pages gives one dense series with strong structure, ideal for SARIMA, Prophet and decomposition.</a:t>
             </a:r>
             <a:endParaRPr lang="en-US" sz="1100" dirty="0"/>
           </a:p>
           <a:p>
-            <a:pPr indent="0" marL="0">
+            <a:pPr marL="0" indent="0">
               <a:buNone/>
             </a:pPr>
             <a:r>
@@ -3702,7 +3481,7 @@
             <a:endParaRPr lang="en-US" sz="1100" dirty="0"/>
           </a:p>
           <a:p>
-            <a:pPr indent="0" marL="0">
+            <a:pPr marL="0" indent="0">
               <a:buNone/>
             </a:pPr>
             <a:r>
@@ -3719,7 +3498,7 @@
             <a:endParaRPr lang="en-US" sz="1100" dirty="0"/>
           </a:p>
           <a:p>
-            <a:pPr indent="0" marL="0">
+            <a:pPr marL="0" indent="0">
               <a:buNone/>
             </a:pPr>
             <a:r>
@@ -3758,7 +3537,7 @@
           <a:bodyPr wrap="square" rtlCol="0" anchor="ctr"/>
           <a:lstStyle/>
           <a:p>
-            <a:pPr algn="r" indent="0" marL="0">
+            <a:pPr marL="0" indent="0" algn="r">
               <a:buNone/>
             </a:pPr>
             <a:r>
@@ -3792,6 +3571,7 @@
         <a:solidFill>
           <a:srgbClr val="FFFFFF"/>
         </a:solidFill>
+        <a:effectLst/>
       </p:bgPr>
     </p:bg>
     <p:spTree>
@@ -3829,7 +3609,7 @@
           <a:bodyPr wrap="square" lIns="0" tIns="0" rIns="0" bIns="0" rtlCol="0" anchor="ctr"/>
           <a:lstStyle/>
           <a:p>
-            <a:pPr indent="0" marL="0">
+            <a:pPr marL="0" indent="0">
               <a:buNone/>
             </a:pPr>
             <a:r>
@@ -3868,7 +3648,7 @@
           <a:bodyPr wrap="square" lIns="0" tIns="0" rIns="0" bIns="0" rtlCol="0" anchor="ctr"/>
           <a:lstStyle/>
           <a:p>
-            <a:pPr indent="0" marL="0">
+            <a:pPr marL="0" indent="0">
               <a:buNone/>
             </a:pPr>
             <a:r>
@@ -3888,14 +3668,14 @@
       </p:sp>
       <p:pic>
         <p:nvPicPr>
-          <p:cNvPr id="4" name="Image 0" descr="/sessions/relaxed-magical-maxwell/mnt/outputs/figs/02_acf_pacf.png">    </p:cNvPr>
+          <p:cNvPr id="4" name="Image 0" descr="/sessions/relaxed-magical-maxwell/mnt/outputs/figs/02_acf_pacf.png"/>
           <p:cNvPicPr>
             <a:picLocks noChangeAspect="1"/>
           </p:cNvPicPr>
           <p:nvPr/>
         </p:nvPicPr>
         <p:blipFill>
-          <a:blip r:embed="rId1"/>
+          <a:blip r:embed="rId3"/>
           <a:stretch>
             <a:fillRect/>
           </a:stretch>
@@ -3931,13 +3711,20 @@
           </a:solidFill>
           <a:ln/>
           <a:effectLst>
-            <a:outerShdw sx="100000" sy="100000" kx="0" ky="0" algn="bl" rotWithShape="0" blurRad="76200" dist="25400" dir="2700000">
+            <a:outerShdw blurRad="76200" dist="25400" dir="2700000" algn="bl" rotWithShape="0">
               <a:srgbClr val="000000">
                 <a:alpha val="13000"/>
               </a:srgbClr>
             </a:outerShdw>
           </a:effectLst>
         </p:spPr>
+        <p:txBody>
+          <a:bodyPr/>
+          <a:lstStyle/>
+          <a:p>
+            <a:endParaRPr lang="en-US"/>
+          </a:p>
+        </p:txBody>
       </p:sp>
       <p:sp>
         <p:nvSpPr>
@@ -3960,7 +3747,7 @@
           <a:bodyPr wrap="square" lIns="0" tIns="0" rIns="0" bIns="0" rtlCol="0" anchor="t"/>
           <a:lstStyle/>
           <a:p>
-            <a:pPr indent="0" marL="0">
+            <a:pPr marL="0" indent="0">
               <a:buNone/>
             </a:pPr>
             <a:r>
@@ -3977,7 +3764,7 @@
             <a:endParaRPr lang="en-US" sz="1150" dirty="0"/>
           </a:p>
           <a:p>
-            <a:pPr indent="0" marL="0">
+            <a:pPr marL="0" indent="0">
               <a:buNone/>
             </a:pPr>
             <a:r>
@@ -3994,7 +3781,7 @@
             <a:endParaRPr lang="en-US" sz="1150" dirty="0"/>
           </a:p>
           <a:p>
-            <a:pPr indent="0" marL="0">
+            <a:pPr marL="0" indent="0">
               <a:buNone/>
             </a:pPr>
             <a:r>
@@ -4011,7 +3798,7 @@
             <a:endParaRPr lang="en-US" sz="1150" dirty="0"/>
           </a:p>
           <a:p>
-            <a:pPr indent="0" marL="0">
+            <a:pPr marL="0" indent="0">
               <a:buNone/>
             </a:pPr>
             <a:r>
@@ -4050,13 +3837,20 @@
           </a:solidFill>
           <a:ln/>
           <a:effectLst>
-            <a:outerShdw sx="100000" sy="100000" kx="0" ky="0" algn="bl" rotWithShape="0" blurRad="76200" dist="25400" dir="2700000">
+            <a:outerShdw blurRad="76200" dist="25400" dir="2700000" algn="bl" rotWithShape="0">
               <a:srgbClr val="000000">
                 <a:alpha val="13000"/>
               </a:srgbClr>
             </a:outerShdw>
           </a:effectLst>
         </p:spPr>
+        <p:txBody>
+          <a:bodyPr/>
+          <a:lstStyle/>
+          <a:p>
+            <a:endParaRPr lang="en-US"/>
+          </a:p>
+        </p:txBody>
       </p:sp>
       <p:sp>
         <p:nvSpPr>
@@ -4079,7 +3873,7 @@
           <a:bodyPr wrap="square" lIns="0" tIns="0" rIns="0" bIns="0" rtlCol="0" anchor="t"/>
           <a:lstStyle/>
           <a:p>
-            <a:pPr indent="0" marL="0">
+            <a:pPr marL="0" indent="0">
               <a:buNone/>
             </a:pPr>
             <a:r>
@@ -4096,7 +3890,7 @@
             <a:endParaRPr lang="en-US" sz="1150" dirty="0"/>
           </a:p>
           <a:p>
-            <a:pPr indent="0" marL="0">
+            <a:pPr marL="0" indent="0">
               <a:buNone/>
             </a:pPr>
             <a:r>
@@ -4113,7 +3907,7 @@
             <a:endParaRPr lang="en-US" sz="1150" dirty="0"/>
           </a:p>
           <a:p>
-            <a:pPr indent="0" marL="0">
+            <a:pPr marL="0" indent="0">
               <a:buNone/>
             </a:pPr>
             <a:r>
@@ -4152,7 +3946,7 @@
           <a:bodyPr wrap="square" rtlCol="0" anchor="ctr"/>
           <a:lstStyle/>
           <a:p>
-            <a:pPr algn="r" indent="0" marL="0">
+            <a:pPr marL="0" indent="0" algn="r">
               <a:buNone/>
             </a:pPr>
             <a:r>
@@ -4186,6 +3980,7 @@
         <a:solidFill>
           <a:srgbClr val="FFFFFF"/>
         </a:solidFill>
+        <a:effectLst/>
       </p:bgPr>
     </p:bg>
     <p:spTree>
@@ -4223,7 +4018,7 @@
           <a:bodyPr wrap="square" lIns="0" tIns="0" rIns="0" bIns="0" rtlCol="0" anchor="ctr"/>
           <a:lstStyle/>
           <a:p>
-            <a:pPr indent="0" marL="0">
+            <a:pPr marL="0" indent="0">
               <a:buNone/>
             </a:pPr>
             <a:r>
@@ -4235,7 +4030,7 @@
                 <a:ea typeface="Cambria" pitchFamily="34" charset="-122"/>
                 <a:cs typeface="Cambria" pitchFamily="34" charset="-120"/>
               </a:rPr>
-              <a:t>Decomposition — Classical &amp; STL</a:t>
+              <a:t>Decomposition: Classical &amp; STL</a:t>
             </a:r>
             <a:endParaRPr lang="en-US" sz="2800" dirty="0"/>
           </a:p>
@@ -4262,7 +4057,7 @@
           <a:bodyPr wrap="square" lIns="0" tIns="0" rIns="0" bIns="0" rtlCol="0" anchor="ctr"/>
           <a:lstStyle/>
           <a:p>
-            <a:pPr indent="0" marL="0">
+            <a:pPr marL="0" indent="0">
               <a:buNone/>
             </a:pPr>
             <a:r>
@@ -4282,14 +4077,14 @@
       </p:sp>
       <p:pic>
         <p:nvPicPr>
-          <p:cNvPr id="4" name="Image 0" descr="/sessions/relaxed-magical-maxwell/mnt/outputs/figs/03_decomp_stl.png">    </p:cNvPr>
+          <p:cNvPr id="4" name="Image 0" descr="/sessions/relaxed-magical-maxwell/mnt/outputs/figs/03_decomp_stl.png"/>
           <p:cNvPicPr>
             <a:picLocks noChangeAspect="1"/>
           </p:cNvPicPr>
           <p:nvPr/>
         </p:nvPicPr>
         <p:blipFill>
-          <a:blip r:embed="rId1"/>
+          <a:blip r:embed="rId3"/>
           <a:stretch>
             <a:fillRect/>
           </a:stretch>
@@ -4325,13 +4120,20 @@
           </a:solidFill>
           <a:ln/>
           <a:effectLst>
-            <a:outerShdw sx="100000" sy="100000" kx="0" ky="0" algn="bl" rotWithShape="0" blurRad="76200" dist="25400" dir="2700000">
+            <a:outerShdw blurRad="76200" dist="25400" dir="2700000" algn="bl" rotWithShape="0">
               <a:srgbClr val="000000">
                 <a:alpha val="13000"/>
               </a:srgbClr>
             </a:outerShdw>
           </a:effectLst>
         </p:spPr>
+        <p:txBody>
+          <a:bodyPr/>
+          <a:lstStyle/>
+          <a:p>
+            <a:endParaRPr lang="en-US"/>
+          </a:p>
+        </p:txBody>
       </p:sp>
       <p:sp>
         <p:nvSpPr>
@@ -4354,7 +4156,7 @@
           <a:bodyPr wrap="square" lIns="0" tIns="0" rIns="0" bIns="0" rtlCol="0" anchor="t"/>
           <a:lstStyle/>
           <a:p>
-            <a:pPr indent="0" marL="0">
+            <a:pPr marL="0" indent="0">
               <a:buNone/>
             </a:pPr>
             <a:r>
@@ -4371,7 +4173,7 @@
             <a:endParaRPr lang="en-US" sz="1200" dirty="0"/>
           </a:p>
           <a:p>
-            <a:pPr indent="0" marL="0">
+            <a:pPr marL="0" indent="0">
               <a:buNone/>
             </a:pPr>
             <a:r>
@@ -4410,13 +4212,20 @@
           </a:solidFill>
           <a:ln/>
           <a:effectLst>
-            <a:outerShdw sx="100000" sy="100000" kx="0" ky="0" algn="bl" rotWithShape="0" blurRad="76200" dist="25400" dir="2700000">
+            <a:outerShdw blurRad="76200" dist="25400" dir="2700000" algn="bl" rotWithShape="0">
               <a:srgbClr val="000000">
                 <a:alpha val="13000"/>
               </a:srgbClr>
             </a:outerShdw>
           </a:effectLst>
         </p:spPr>
+        <p:txBody>
+          <a:bodyPr/>
+          <a:lstStyle/>
+          <a:p>
+            <a:endParaRPr lang="en-US"/>
+          </a:p>
+        </p:txBody>
       </p:sp>
       <p:sp>
         <p:nvSpPr>
@@ -4439,7 +4248,7 @@
           <a:bodyPr wrap="square" lIns="0" tIns="0" rIns="0" bIns="0" rtlCol="0" anchor="t"/>
           <a:lstStyle/>
           <a:p>
-            <a:pPr indent="0" marL="0">
+            <a:pPr marL="0" indent="0">
               <a:buNone/>
             </a:pPr>
             <a:r>
@@ -4456,7 +4265,7 @@
             <a:endParaRPr lang="en-US" sz="1200" dirty="0"/>
           </a:p>
           <a:p>
-            <a:pPr indent="0" marL="0">
+            <a:pPr marL="0" indent="0">
               <a:buNone/>
             </a:pPr>
             <a:r>
@@ -4468,7 +4277,7 @@
                 <a:ea typeface="Calibri" pitchFamily="34" charset="-122"/>
                 <a:cs typeface="Calibri" pitchFamily="34" charset="-120"/>
               </a:rPr>
-              <a:t>Stable weekly cycle: Monday peak (+11M), Friday trough (−10M) — workweek browsing.</a:t>
+              <a:t>Stable weekly cycle: Monday peak (+11M), Friday trough (−10M), a workweek browsing.</a:t>
             </a:r>
             <a:endParaRPr lang="en-US" sz="1200" dirty="0"/>
           </a:p>
@@ -4495,13 +4304,20 @@
           </a:solidFill>
           <a:ln/>
           <a:effectLst>
-            <a:outerShdw sx="100000" sy="100000" kx="0" ky="0" algn="bl" rotWithShape="0" blurRad="76200" dist="25400" dir="2700000">
+            <a:outerShdw blurRad="76200" dist="25400" dir="2700000" algn="bl" rotWithShape="0">
               <a:srgbClr val="000000">
                 <a:alpha val="13000"/>
               </a:srgbClr>
             </a:outerShdw>
           </a:effectLst>
         </p:spPr>
+        <p:txBody>
+          <a:bodyPr/>
+          <a:lstStyle/>
+          <a:p>
+            <a:endParaRPr lang="en-US"/>
+          </a:p>
+        </p:txBody>
       </p:sp>
       <p:sp>
         <p:nvSpPr>
@@ -4524,7 +4340,7 @@
           <a:bodyPr wrap="square" lIns="0" tIns="0" rIns="0" bIns="0" rtlCol="0" anchor="t"/>
           <a:lstStyle/>
           <a:p>
-            <a:pPr indent="0" marL="0">
+            <a:pPr marL="0" indent="0">
               <a:buNone/>
             </a:pPr>
             <a:r>
@@ -4541,7 +4357,7 @@
             <a:endParaRPr lang="en-US" sz="1200" dirty="0"/>
           </a:p>
           <a:p>
-            <a:pPr indent="0" marL="0">
+            <a:pPr marL="0" indent="0">
               <a:buNone/>
             </a:pPr>
             <a:r>
@@ -4553,7 +4369,7 @@
                 <a:ea typeface="Calibri" pitchFamily="34" charset="-122"/>
                 <a:cs typeface="Calibri" pitchFamily="34" charset="-120"/>
               </a:rPr>
-              <a:t>Mostly noise, plus large isolated spikes — real-world events, hunted in the anomaly step.</a:t>
+              <a:t>Mostly noise, plus large isolated spikes, real-world events, hunted in the anomaly step.</a:t>
             </a:r>
             <a:endParaRPr lang="en-US" sz="1200" dirty="0"/>
           </a:p>
@@ -4580,7 +4396,7 @@
           <a:bodyPr wrap="square" rtlCol="0" anchor="ctr"/>
           <a:lstStyle/>
           <a:p>
-            <a:pPr algn="r" indent="0" marL="0">
+            <a:pPr marL="0" indent="0" algn="r">
               <a:buNone/>
             </a:pPr>
             <a:r>
@@ -4614,6 +4430,7 @@
         <a:solidFill>
           <a:srgbClr val="FFFFFF"/>
         </a:solidFill>
+        <a:effectLst/>
       </p:bgPr>
     </p:bg>
     <p:spTree>
@@ -4651,7 +4468,7 @@
           <a:bodyPr wrap="square" lIns="0" tIns="0" rIns="0" bIns="0" rtlCol="0" anchor="ctr"/>
           <a:lstStyle/>
           <a:p>
-            <a:pPr indent="0" marL="0">
+            <a:pPr marL="0" indent="0">
               <a:buNone/>
             </a:pPr>
             <a:r>
@@ -4663,7 +4480,7 @@
                 <a:ea typeface="Cambria" pitchFamily="34" charset="-122"/>
                 <a:cs typeface="Cambria" pitchFamily="34" charset="-120"/>
               </a:rPr>
-              <a:t>Initial Forecast — SARIMA vs Prophet</a:t>
+              <a:t>Initial Forecast: SARIMA vs Prophet</a:t>
             </a:r>
             <a:endParaRPr lang="en-US" sz="2800" dirty="0"/>
           </a:p>
@@ -4690,7 +4507,7 @@
           <a:bodyPr wrap="square" lIns="0" tIns="0" rIns="0" bIns="0" rtlCol="0" anchor="ctr"/>
           <a:lstStyle/>
           <a:p>
-            <a:pPr indent="0" marL="0">
+            <a:pPr marL="0" indent="0">
               <a:buNone/>
             </a:pPr>
             <a:r>
@@ -4710,14 +4527,14 @@
       </p:sp>
       <p:pic>
         <p:nvPicPr>
-          <p:cNvPr id="4" name="Image 0" descr="/sessions/relaxed-magical-maxwell/mnt/outputs/figs/04_forecast_before.png">    </p:cNvPr>
+          <p:cNvPr id="4" name="Image 0" descr="/sessions/relaxed-magical-maxwell/mnt/outputs/figs/04_forecast_before.png"/>
           <p:cNvPicPr>
             <a:picLocks noChangeAspect="1"/>
           </p:cNvPicPr>
           <p:nvPr/>
         </p:nvPicPr>
         <p:blipFill>
-          <a:blip r:embed="rId1"/>
+          <a:blip r:embed="rId3"/>
           <a:stretch>
             <a:fillRect/>
           </a:stretch>
@@ -4753,13 +4570,20 @@
           </a:solidFill>
           <a:ln/>
           <a:effectLst>
-            <a:outerShdw sx="100000" sy="100000" kx="0" ky="0" algn="bl" rotWithShape="0" blurRad="76200" dist="25400" dir="2700000">
+            <a:outerShdw blurRad="76200" dist="25400" dir="2700000" algn="bl" rotWithShape="0">
               <a:srgbClr val="000000">
                 <a:alpha val="13000"/>
               </a:srgbClr>
             </a:outerShdw>
           </a:effectLst>
         </p:spPr>
+        <p:txBody>
+          <a:bodyPr/>
+          <a:lstStyle/>
+          <a:p>
+            <a:endParaRPr lang="en-US"/>
+          </a:p>
+        </p:txBody>
       </p:sp>
       <p:sp>
         <p:nvSpPr>
@@ -4782,7 +4606,7 @@
           <a:bodyPr wrap="square" lIns="0" tIns="0" rIns="0" bIns="0" rtlCol="0" anchor="t"/>
           <a:lstStyle/>
           <a:p>
-            <a:pPr indent="0" marL="0">
+            <a:pPr marL="0" indent="0">
               <a:buNone/>
             </a:pPr>
             <a:r>
@@ -4799,7 +4623,7 @@
             <a:endParaRPr lang="en-US" sz="1100" dirty="0"/>
           </a:p>
           <a:p>
-            <a:pPr indent="0" marL="0">
+            <a:pPr marL="0" indent="0">
               <a:buNone/>
             </a:pPr>
             <a:r>
@@ -4816,7 +4640,7 @@
             <a:endParaRPr lang="en-US" sz="1100" dirty="0"/>
           </a:p>
           <a:p>
-            <a:pPr indent="0" marL="0">
+            <a:pPr marL="0" indent="0">
               <a:buNone/>
             </a:pPr>
             <a:r>
@@ -4833,7 +4657,7 @@
             <a:endParaRPr lang="en-US" sz="1100" dirty="0"/>
           </a:p>
           <a:p>
-            <a:pPr indent="0" marL="0">
+            <a:pPr marL="0" indent="0">
               <a:buNone/>
             </a:pPr>
             <a:r>
@@ -4850,7 +4674,7 @@
             <a:endParaRPr lang="en-US" sz="1100" dirty="0"/>
           </a:p>
           <a:p>
-            <a:pPr indent="0" marL="0">
+            <a:pPr marL="0" indent="0">
               <a:buNone/>
             </a:pPr>
             <a:r>
@@ -4867,7 +4691,7 @@
             <a:endParaRPr lang="en-US" sz="1100" dirty="0"/>
           </a:p>
           <a:p>
-            <a:pPr indent="0" marL="0">
+            <a:pPr marL="0" indent="0">
               <a:buNone/>
             </a:pPr>
             <a:r>
@@ -4887,7 +4711,7 @@
       </p:sp>
       <p:graphicFrame>
         <p:nvGraphicFramePr>
-          <p:cNvPr id="6" name="Table 0"/>
+          <p:cNvPr id="7" name="Table 0"/>
           <p:cNvGraphicFramePr>
             <a:graphicFrameLocks noGrp="1"/>
           </p:cNvGraphicFramePr>
@@ -4908,10 +4732,34 @@
             <a:tbl>
               <a:tblPr/>
               <a:tblGrid>
-                <a:gridCol w="2194560"/>
-                <a:gridCol w="1325880"/>
-                <a:gridCol w="1325880"/>
-                <a:gridCol w="1325880"/>
+                <a:gridCol w="2194560">
+                  <a:extLst>
+                    <a:ext uri="{9D8B030D-6E8A-4147-A177-3AD203B41FA5}">
+                      <a16:colId xmlns:a16="http://schemas.microsoft.com/office/drawing/2014/main" val="20000"/>
+                    </a:ext>
+                  </a:extLst>
+                </a:gridCol>
+                <a:gridCol w="1325880">
+                  <a:extLst>
+                    <a:ext uri="{9D8B030D-6E8A-4147-A177-3AD203B41FA5}">
+                      <a16:colId xmlns:a16="http://schemas.microsoft.com/office/drawing/2014/main" val="20001"/>
+                    </a:ext>
+                  </a:extLst>
+                </a:gridCol>
+                <a:gridCol w="1325880">
+                  <a:extLst>
+                    <a:ext uri="{9D8B030D-6E8A-4147-A177-3AD203B41FA5}">
+                      <a16:colId xmlns:a16="http://schemas.microsoft.com/office/drawing/2014/main" val="20002"/>
+                    </a:ext>
+                  </a:extLst>
+                </a:gridCol>
+                <a:gridCol w="1325880">
+                  <a:extLst>
+                    <a:ext uri="{9D8B030D-6E8A-4147-A177-3AD203B41FA5}">
+                      <a16:colId xmlns:a16="http://schemas.microsoft.com/office/drawing/2014/main" val="20003"/>
+                    </a:ext>
+                  </a:extLst>
+                </a:gridCol>
               </a:tblGrid>
               <a:tr h="274320">
                 <a:tc>
@@ -4919,7 +4767,7 @@
                     <a:bodyPr/>
                     <a:lstStyle/>
                     <a:p>
-                      <a:pPr algn="ctr" indent="0" marL="0">
+                      <a:pPr marL="0" indent="0" algn="ctr">
                         <a:buNone/>
                       </a:pPr>
                       <a:r>
@@ -4940,7 +4788,7 @@
                       </a:endParaRPr>
                     </a:p>
                   </a:txBody>
-                  <a:tcPr marL="91440" marR="91440" marT="45720" marB="45720" anchor="ctr">
+                  <a:tcPr anchor="ctr">
                     <a:lnL w="6350" cap="flat" cmpd="sng" algn="ctr">
                       <a:solidFill>
                         <a:srgbClr val="D5DEEF"/>
@@ -4987,7 +4835,7 @@
                     <a:bodyPr/>
                     <a:lstStyle/>
                     <a:p>
-                      <a:pPr algn="ctr" indent="0" marL="0">
+                      <a:pPr marL="0" indent="0" algn="ctr">
                         <a:buNone/>
                       </a:pPr>
                       <a:r>
@@ -5008,7 +4856,7 @@
                       </a:endParaRPr>
                     </a:p>
                   </a:txBody>
-                  <a:tcPr marL="91440" marR="91440" marT="45720" marB="45720" anchor="ctr">
+                  <a:tcPr anchor="ctr">
                     <a:lnL w="6350" cap="flat" cmpd="sng" algn="ctr">
                       <a:solidFill>
                         <a:srgbClr val="D5DEEF"/>
@@ -5055,7 +4903,7 @@
                     <a:bodyPr/>
                     <a:lstStyle/>
                     <a:p>
-                      <a:pPr algn="ctr" indent="0" marL="0">
+                      <a:pPr marL="0" indent="0" algn="ctr">
                         <a:buNone/>
                       </a:pPr>
                       <a:r>
@@ -5076,7 +4924,7 @@
                       </a:endParaRPr>
                     </a:p>
                   </a:txBody>
-                  <a:tcPr marL="91440" marR="91440" marT="45720" marB="45720" anchor="ctr">
+                  <a:tcPr anchor="ctr">
                     <a:lnL w="6350" cap="flat" cmpd="sng" algn="ctr">
                       <a:solidFill>
                         <a:srgbClr val="D5DEEF"/>
@@ -5123,7 +4971,7 @@
                     <a:bodyPr/>
                     <a:lstStyle/>
                     <a:p>
-                      <a:pPr algn="ctr" indent="0" marL="0">
+                      <a:pPr marL="0" indent="0" algn="ctr">
                         <a:buNone/>
                       </a:pPr>
                       <a:r>
@@ -5144,7 +4992,7 @@
                       </a:endParaRPr>
                     </a:p>
                   </a:txBody>
-                  <a:tcPr marL="91440" marR="91440" marT="45720" marB="45720" anchor="ctr">
+                  <a:tcPr anchor="ctr">
                     <a:lnL w="6350" cap="flat" cmpd="sng" algn="ctr">
                       <a:solidFill>
                         <a:srgbClr val="D5DEEF"/>
@@ -5186,6 +5034,11 @@
                     </a:solidFill>
                   </a:tcPr>
                 </a:tc>
+                <a:extLst>
+                  <a:ext uri="{0D108BD9-81ED-4DB2-BD59-A6C34878D82A}">
+                    <a16:rowId xmlns:a16="http://schemas.microsoft.com/office/drawing/2014/main" val="10000"/>
+                  </a:ext>
+                </a:extLst>
               </a:tr>
               <a:tr h="274320">
                 <a:tc>
@@ -5193,7 +5046,7 @@
                     <a:bodyPr/>
                     <a:lstStyle/>
                     <a:p>
-                      <a:pPr algn="ctr" indent="0" marL="0">
+                      <a:pPr marL="0" indent="0" algn="ctr">
                         <a:buNone/>
                       </a:pPr>
                       <a:r>
@@ -5214,7 +5067,7 @@
                       </a:endParaRPr>
                     </a:p>
                   </a:txBody>
-                  <a:tcPr marL="91440" marR="91440" marT="45720" marB="45720" anchor="ctr">
+                  <a:tcPr anchor="ctr">
                     <a:lnL w="6350" cap="flat" cmpd="sng" algn="ctr">
                       <a:solidFill>
                         <a:srgbClr val="D5DEEF"/>
@@ -5258,7 +5111,7 @@
                     <a:bodyPr/>
                     <a:lstStyle/>
                     <a:p>
-                      <a:pPr algn="ctr" indent="0" marL="0">
+                      <a:pPr marL="0" indent="0" algn="ctr">
                         <a:buNone/>
                       </a:pPr>
                       <a:r>
@@ -5279,7 +5132,7 @@
                       </a:endParaRPr>
                     </a:p>
                   </a:txBody>
-                  <a:tcPr marL="91440" marR="91440" marT="45720" marB="45720" anchor="ctr">
+                  <a:tcPr anchor="ctr">
                     <a:lnL w="6350" cap="flat" cmpd="sng" algn="ctr">
                       <a:solidFill>
                         <a:srgbClr val="D5DEEF"/>
@@ -5323,7 +5176,7 @@
                     <a:bodyPr/>
                     <a:lstStyle/>
                     <a:p>
-                      <a:pPr algn="ctr" indent="0" marL="0">
+                      <a:pPr marL="0" indent="0" algn="ctr">
                         <a:buNone/>
                       </a:pPr>
                       <a:r>
@@ -5344,7 +5197,7 @@
                       </a:endParaRPr>
                     </a:p>
                   </a:txBody>
-                  <a:tcPr marL="91440" marR="91440" marT="45720" marB="45720" anchor="ctr">
+                  <a:tcPr anchor="ctr">
                     <a:lnL w="6350" cap="flat" cmpd="sng" algn="ctr">
                       <a:solidFill>
                         <a:srgbClr val="D5DEEF"/>
@@ -5388,7 +5241,7 @@
                     <a:bodyPr/>
                     <a:lstStyle/>
                     <a:p>
-                      <a:pPr algn="ctr" indent="0" marL="0">
+                      <a:pPr marL="0" indent="0" algn="ctr">
                         <a:buNone/>
                       </a:pPr>
                       <a:r>
@@ -5409,7 +5262,7 @@
                       </a:endParaRPr>
                     </a:p>
                   </a:txBody>
-                  <a:tcPr marL="91440" marR="91440" marT="45720" marB="45720" anchor="ctr">
+                  <a:tcPr anchor="ctr">
                     <a:lnL w="6350" cap="flat" cmpd="sng" algn="ctr">
                       <a:solidFill>
                         <a:srgbClr val="D5DEEF"/>
@@ -5448,6 +5301,11 @@
                     </a:lnB>
                   </a:tcPr>
                 </a:tc>
+                <a:extLst>
+                  <a:ext uri="{0D108BD9-81ED-4DB2-BD59-A6C34878D82A}">
+                    <a16:rowId xmlns:a16="http://schemas.microsoft.com/office/drawing/2014/main" val="10001"/>
+                  </a:ext>
+                </a:extLst>
               </a:tr>
               <a:tr h="274320">
                 <a:tc>
@@ -5455,7 +5313,7 @@
                     <a:bodyPr/>
                     <a:lstStyle/>
                     <a:p>
-                      <a:pPr algn="ctr" indent="0" marL="0">
+                      <a:pPr marL="0" indent="0" algn="ctr">
                         <a:buNone/>
                       </a:pPr>
                       <a:r>
@@ -5476,7 +5334,7 @@
                       </a:endParaRPr>
                     </a:p>
                   </a:txBody>
-                  <a:tcPr marL="91440" marR="91440" marT="45720" marB="45720" anchor="ctr">
+                  <a:tcPr anchor="ctr">
                     <a:lnL w="6350" cap="flat" cmpd="sng" algn="ctr">
                       <a:solidFill>
                         <a:srgbClr val="D5DEEF"/>
@@ -5520,7 +5378,7 @@
                     <a:bodyPr/>
                     <a:lstStyle/>
                     <a:p>
-                      <a:pPr algn="ctr" indent="0" marL="0">
+                      <a:pPr marL="0" indent="0" algn="ctr">
                         <a:buNone/>
                       </a:pPr>
                       <a:r>
@@ -5541,7 +5399,7 @@
                       </a:endParaRPr>
                     </a:p>
                   </a:txBody>
-                  <a:tcPr marL="91440" marR="91440" marT="45720" marB="45720" anchor="ctr">
+                  <a:tcPr anchor="ctr">
                     <a:lnL w="6350" cap="flat" cmpd="sng" algn="ctr">
                       <a:solidFill>
                         <a:srgbClr val="D5DEEF"/>
@@ -5585,7 +5443,7 @@
                     <a:bodyPr/>
                     <a:lstStyle/>
                     <a:p>
-                      <a:pPr algn="ctr" indent="0" marL="0">
+                      <a:pPr marL="0" indent="0" algn="ctr">
                         <a:buNone/>
                       </a:pPr>
                       <a:r>
@@ -5606,7 +5464,7 @@
                       </a:endParaRPr>
                     </a:p>
                   </a:txBody>
-                  <a:tcPr marL="91440" marR="91440" marT="45720" marB="45720" anchor="ctr">
+                  <a:tcPr anchor="ctr">
                     <a:lnL w="6350" cap="flat" cmpd="sng" algn="ctr">
                       <a:solidFill>
                         <a:srgbClr val="D5DEEF"/>
@@ -5650,7 +5508,7 @@
                     <a:bodyPr/>
                     <a:lstStyle/>
                     <a:p>
-                      <a:pPr algn="ctr" indent="0" marL="0">
+                      <a:pPr marL="0" indent="0" algn="ctr">
                         <a:buNone/>
                       </a:pPr>
                       <a:r>
@@ -5671,7 +5529,7 @@
                       </a:endParaRPr>
                     </a:p>
                   </a:txBody>
-                  <a:tcPr marL="91440" marR="91440" marT="45720" marB="45720" anchor="ctr">
+                  <a:tcPr anchor="ctr">
                     <a:lnL w="6350" cap="flat" cmpd="sng" algn="ctr">
                       <a:solidFill>
                         <a:srgbClr val="D5DEEF"/>
@@ -5710,6 +5568,11 @@
                     </a:lnB>
                   </a:tcPr>
                 </a:tc>
+                <a:extLst>
+                  <a:ext uri="{0D108BD9-81ED-4DB2-BD59-A6C34878D82A}">
+                    <a16:rowId xmlns:a16="http://schemas.microsoft.com/office/drawing/2014/main" val="10002"/>
+                  </a:ext>
+                </a:extLst>
               </a:tr>
             </a:tbl>
           </a:graphicData>
@@ -5736,7 +5599,7 @@
           <a:bodyPr wrap="square" lIns="0" tIns="0" rIns="0" bIns="0" rtlCol="0" anchor="t"/>
           <a:lstStyle/>
           <a:p>
-            <a:pPr indent="0" marL="0">
+            <a:pPr marL="0" indent="0">
               <a:buNone/>
             </a:pPr>
             <a:r>
@@ -5775,7 +5638,7 @@
           <a:bodyPr wrap="square" rtlCol="0" anchor="ctr"/>
           <a:lstStyle/>
           <a:p>
-            <a:pPr algn="r" indent="0" marL="0">
+            <a:pPr marL="0" indent="0" algn="r">
               <a:buNone/>
             </a:pPr>
             <a:r>
@@ -5809,6 +5672,7 @@
         <a:solidFill>
           <a:srgbClr val="FFFFFF"/>
         </a:solidFill>
+        <a:effectLst/>
       </p:bgPr>
     </p:bg>
     <p:spTree>
@@ -5846,7 +5710,7 @@
           <a:bodyPr wrap="square" lIns="0" tIns="0" rIns="0" bIns="0" rtlCol="0" anchor="ctr"/>
           <a:lstStyle/>
           <a:p>
-            <a:pPr indent="0" marL="0">
+            <a:pPr marL="0" indent="0">
               <a:buNone/>
             </a:pPr>
             <a:r>
@@ -5858,7 +5722,7 @@
                 <a:ea typeface="Cambria" pitchFamily="34" charset="-122"/>
                 <a:cs typeface="Cambria" pitchFamily="34" charset="-120"/>
               </a:rPr>
-              <a:t>Anomaly Detection — Four Methods</a:t>
+              <a:t>Anomaly Detection: Four Methods</a:t>
             </a:r>
             <a:endParaRPr lang="en-US" sz="2800" dirty="0"/>
           </a:p>
@@ -5885,7 +5749,7 @@
           <a:bodyPr wrap="square" lIns="0" tIns="0" rIns="0" bIns="0" rtlCol="0" anchor="ctr"/>
           <a:lstStyle/>
           <a:p>
-            <a:pPr indent="0" marL="0">
+            <a:pPr marL="0" indent="0">
               <a:buNone/>
             </a:pPr>
             <a:r>
@@ -5924,13 +5788,20 @@
           </a:solidFill>
           <a:ln/>
           <a:effectLst>
-            <a:outerShdw sx="100000" sy="100000" kx="0" ky="0" algn="bl" rotWithShape="0" blurRad="76200" dist="25400" dir="2700000">
+            <a:outerShdw blurRad="76200" dist="25400" dir="2700000" algn="bl" rotWithShape="0">
               <a:srgbClr val="000000">
                 <a:alpha val="13000"/>
               </a:srgbClr>
             </a:outerShdw>
           </a:effectLst>
         </p:spPr>
+        <p:txBody>
+          <a:bodyPr/>
+          <a:lstStyle/>
+          <a:p>
+            <a:endParaRPr lang="en-US"/>
+          </a:p>
+        </p:txBody>
       </p:sp>
       <p:sp>
         <p:nvSpPr>
@@ -5953,7 +5824,7 @@
           <a:bodyPr wrap="square" lIns="0" tIns="0" rIns="0" bIns="0" rtlCol="0" anchor="ctr"/>
           <a:lstStyle/>
           <a:p>
-            <a:pPr algn="ctr" indent="0" marL="0">
+            <a:pPr marL="0" indent="0" algn="ctr">
               <a:buNone/>
             </a:pPr>
             <a:r>
@@ -5992,7 +5863,7 @@
           <a:bodyPr wrap="square" lIns="0" tIns="0" rIns="0" bIns="0" rtlCol="0" anchor="t"/>
           <a:lstStyle/>
           <a:p>
-            <a:pPr indent="0" marL="0">
+            <a:pPr marL="0" indent="0">
               <a:buNone/>
             </a:pPr>
             <a:r>
@@ -6006,9 +5877,6 @@
               </a:rPr>
               <a:t>Robust Z-score   </a:t>
             </a:r>
-            <a:pPr indent="0" marL="0">
-              <a:buNone/>
-            </a:pPr>
             <a:r>
               <a:rPr lang="en-US" sz="1050" i="1" dirty="0">
                 <a:solidFill>
@@ -6023,7 +5891,7 @@
             <a:endParaRPr lang="en-US" sz="1400" dirty="0"/>
           </a:p>
           <a:p>
-            <a:pPr indent="0" marL="0">
+            <a:pPr marL="0" indent="0">
               <a:buNone/>
             </a:pPr>
             <a:r>
@@ -6062,13 +5930,20 @@
           </a:solidFill>
           <a:ln/>
           <a:effectLst>
-            <a:outerShdw sx="100000" sy="100000" kx="0" ky="0" algn="bl" rotWithShape="0" blurRad="76200" dist="25400" dir="2700000">
+            <a:outerShdw blurRad="76200" dist="25400" dir="2700000" algn="bl" rotWithShape="0">
               <a:srgbClr val="000000">
                 <a:alpha val="13000"/>
               </a:srgbClr>
             </a:outerShdw>
           </a:effectLst>
         </p:spPr>
+        <p:txBody>
+          <a:bodyPr/>
+          <a:lstStyle/>
+          <a:p>
+            <a:endParaRPr lang="en-US"/>
+          </a:p>
+        </p:txBody>
       </p:sp>
       <p:sp>
         <p:nvSpPr>
@@ -6091,7 +5966,7 @@
           <a:bodyPr wrap="square" lIns="0" tIns="0" rIns="0" bIns="0" rtlCol="0" anchor="ctr"/>
           <a:lstStyle/>
           <a:p>
-            <a:pPr algn="ctr" indent="0" marL="0">
+            <a:pPr marL="0" indent="0" algn="ctr">
               <a:buNone/>
             </a:pPr>
             <a:r>
@@ -6130,7 +6005,7 @@
           <a:bodyPr wrap="square" lIns="0" tIns="0" rIns="0" bIns="0" rtlCol="0" anchor="t"/>
           <a:lstStyle/>
           <a:p>
-            <a:pPr indent="0" marL="0">
+            <a:pPr marL="0" indent="0">
               <a:buNone/>
             </a:pPr>
             <a:r>
@@ -6144,9 +6019,6 @@
               </a:rPr>
               <a:t>SARIMA residuals   </a:t>
             </a:r>
-            <a:pPr indent="0" marL="0">
-              <a:buNone/>
-            </a:pPr>
             <a:r>
               <a:rPr lang="en-US" sz="1050" i="1" dirty="0">
                 <a:solidFill>
@@ -6161,7 +6033,7 @@
             <a:endParaRPr lang="en-US" sz="1400" dirty="0"/>
           </a:p>
           <a:p>
-            <a:pPr indent="0" marL="0">
+            <a:pPr marL="0" indent="0">
               <a:buNone/>
             </a:pPr>
             <a:r>
@@ -6200,13 +6072,20 @@
           </a:solidFill>
           <a:ln/>
           <a:effectLst>
-            <a:outerShdw sx="100000" sy="100000" kx="0" ky="0" algn="bl" rotWithShape="0" blurRad="76200" dist="25400" dir="2700000">
+            <a:outerShdw blurRad="76200" dist="25400" dir="2700000" algn="bl" rotWithShape="0">
               <a:srgbClr val="000000">
                 <a:alpha val="13000"/>
               </a:srgbClr>
             </a:outerShdw>
           </a:effectLst>
         </p:spPr>
+        <p:txBody>
+          <a:bodyPr/>
+          <a:lstStyle/>
+          <a:p>
+            <a:endParaRPr lang="en-US"/>
+          </a:p>
+        </p:txBody>
       </p:sp>
       <p:sp>
         <p:nvSpPr>
@@ -6229,7 +6108,7 @@
           <a:bodyPr wrap="square" lIns="0" tIns="0" rIns="0" bIns="0" rtlCol="0" anchor="ctr"/>
           <a:lstStyle/>
           <a:p>
-            <a:pPr algn="ctr" indent="0" marL="0">
+            <a:pPr marL="0" indent="0" algn="ctr">
               <a:buNone/>
             </a:pPr>
             <a:r>
@@ -6268,7 +6147,7 @@
           <a:bodyPr wrap="square" lIns="0" tIns="0" rIns="0" bIns="0" rtlCol="0" anchor="t"/>
           <a:lstStyle/>
           <a:p>
-            <a:pPr indent="0" marL="0">
+            <a:pPr marL="0" indent="0">
               <a:buNone/>
             </a:pPr>
             <a:r>
@@ -6282,9 +6161,6 @@
               </a:rPr>
               <a:t>Isolation Forest   </a:t>
             </a:r>
-            <a:pPr indent="0" marL="0">
-              <a:buNone/>
-            </a:pPr>
             <a:r>
               <a:rPr lang="en-US" sz="1050" i="1" dirty="0">
                 <a:solidFill>
@@ -6299,7 +6175,7 @@
             <a:endParaRPr lang="en-US" sz="1400" dirty="0"/>
           </a:p>
           <a:p>
-            <a:pPr indent="0" marL="0">
+            <a:pPr marL="0" indent="0">
               <a:buNone/>
             </a:pPr>
             <a:r>
@@ -6338,13 +6214,20 @@
           </a:solidFill>
           <a:ln/>
           <a:effectLst>
-            <a:outerShdw sx="100000" sy="100000" kx="0" ky="0" algn="bl" rotWithShape="0" blurRad="76200" dist="25400" dir="2700000">
+            <a:outerShdw blurRad="76200" dist="25400" dir="2700000" algn="bl" rotWithShape="0">
               <a:srgbClr val="000000">
                 <a:alpha val="13000"/>
               </a:srgbClr>
             </a:outerShdw>
           </a:effectLst>
         </p:spPr>
+        <p:txBody>
+          <a:bodyPr/>
+          <a:lstStyle/>
+          <a:p>
+            <a:endParaRPr lang="en-US"/>
+          </a:p>
+        </p:txBody>
       </p:sp>
       <p:sp>
         <p:nvSpPr>
@@ -6367,7 +6250,7 @@
           <a:bodyPr wrap="square" lIns="0" tIns="0" rIns="0" bIns="0" rtlCol="0" anchor="ctr"/>
           <a:lstStyle/>
           <a:p>
-            <a:pPr algn="ctr" indent="0" marL="0">
+            <a:pPr marL="0" indent="0" algn="ctr">
               <a:buNone/>
             </a:pPr>
             <a:r>
@@ -6406,7 +6289,7 @@
           <a:bodyPr wrap="square" lIns="0" tIns="0" rIns="0" bIns="0" rtlCol="0" anchor="t"/>
           <a:lstStyle/>
           <a:p>
-            <a:pPr indent="0" marL="0">
+            <a:pPr marL="0" indent="0">
               <a:buNone/>
             </a:pPr>
             <a:r>
@@ -6420,9 +6303,6 @@
               </a:rPr>
               <a:t>LSTM Autoencoder   </a:t>
             </a:r>
-            <a:pPr indent="0" marL="0">
-              <a:buNone/>
-            </a:pPr>
             <a:r>
               <a:rPr lang="en-US" sz="1050" i="1" dirty="0">
                 <a:solidFill>
@@ -6437,7 +6317,7 @@
             <a:endParaRPr lang="en-US" sz="1400" dirty="0"/>
           </a:p>
           <a:p>
-            <a:pPr indent="0" marL="0">
+            <a:pPr marL="0" indent="0">
               <a:buNone/>
             </a:pPr>
             <a:r>
@@ -6476,7 +6356,7 @@
           <a:bodyPr wrap="square" rtlCol="0" anchor="ctr"/>
           <a:lstStyle/>
           <a:p>
-            <a:pPr algn="ctr" indent="0" marL="0">
+            <a:pPr marL="0" indent="0" algn="ctr">
               <a:buNone/>
             </a:pPr>
             <a:r>
@@ -6515,7 +6395,7 @@
           <a:bodyPr wrap="square" rtlCol="0" anchor="ctr"/>
           <a:lstStyle/>
           <a:p>
-            <a:pPr algn="r" indent="0" marL="0">
+            <a:pPr marL="0" indent="0" algn="r">
               <a:buNone/>
             </a:pPr>
             <a:r>
@@ -6549,6 +6429,7 @@
         <a:solidFill>
           <a:srgbClr val="FFFFFF"/>
         </a:solidFill>
+        <a:effectLst/>
       </p:bgPr>
     </p:bg>
     <p:spTree>
@@ -6586,7 +6467,7 @@
           <a:bodyPr wrap="square" lIns="0" tIns="0" rIns="0" bIns="0" rtlCol="0" anchor="ctr"/>
           <a:lstStyle/>
           <a:p>
-            <a:pPr indent="0" marL="0">
+            <a:pPr marL="0" indent="0">
               <a:buNone/>
             </a:pPr>
             <a:r>
@@ -6625,7 +6506,7 @@
           <a:bodyPr wrap="square" lIns="0" tIns="0" rIns="0" bIns="0" rtlCol="0" anchor="ctr"/>
           <a:lstStyle/>
           <a:p>
-            <a:pPr indent="0" marL="0">
+            <a:pPr marL="0" indent="0">
               <a:buNone/>
             </a:pPr>
             <a:r>
@@ -6645,14 +6526,14 @@
       </p:sp>
       <p:pic>
         <p:nvPicPr>
-          <p:cNvPr id="4" name="Image 0" descr="/sessions/relaxed-magical-maxwell/mnt/outputs/figs/05_anomalies.png">    </p:cNvPr>
+          <p:cNvPr id="4" name="Image 0" descr="/sessions/relaxed-magical-maxwell/mnt/outputs/figs/05_anomalies.png"/>
           <p:cNvPicPr>
             <a:picLocks noChangeAspect="1"/>
           </p:cNvPicPr>
           <p:nvPr/>
         </p:nvPicPr>
         <p:blipFill>
-          <a:blip r:embed="rId1"/>
+          <a:blip r:embed="rId3"/>
           <a:stretch>
             <a:fillRect/>
           </a:stretch>
@@ -6683,15 +6564,27 @@
         </p:nvGraphicFramePr>
         <p:xfrm>
           <a:off x="5715000" y="1188720"/>
-          <a:ext cx="3063240" cy="2377440"/>
+          <a:ext cx="3063240" cy="2567940"/>
         </p:xfrm>
         <a:graphic>
           <a:graphicData uri="http://schemas.openxmlformats.org/drawingml/2006/table">
             <a:tbl>
               <a:tblPr/>
               <a:tblGrid>
-                <a:gridCol w="1234440"/>
-                <a:gridCol w="1828800"/>
+                <a:gridCol w="1234440">
+                  <a:extLst>
+                    <a:ext uri="{9D8B030D-6E8A-4147-A177-3AD203B41FA5}">
+                      <a16:colId xmlns:a16="http://schemas.microsoft.com/office/drawing/2014/main" val="20000"/>
+                    </a:ext>
+                  </a:extLst>
+                </a:gridCol>
+                <a:gridCol w="1828800">
+                  <a:extLst>
+                    <a:ext uri="{9D8B030D-6E8A-4147-A177-3AD203B41FA5}">
+                      <a16:colId xmlns:a16="http://schemas.microsoft.com/office/drawing/2014/main" val="20001"/>
+                    </a:ext>
+                  </a:extLst>
+                </a:gridCol>
               </a:tblGrid>
               <a:tr h="396240">
                 <a:tc>
@@ -6699,7 +6592,7 @@
                     <a:bodyPr/>
                     <a:lstStyle/>
                     <a:p>
-                      <a:pPr indent="0" marL="0">
+                      <a:pPr marL="0" indent="0">
                         <a:buNone/>
                       </a:pPr>
                       <a:r>
@@ -6720,7 +6613,7 @@
                       </a:endParaRPr>
                     </a:p>
                   </a:txBody>
-                  <a:tcPr marL="91440" marR="91440" marT="45720" marB="45720" anchor="ctr">
+                  <a:tcPr anchor="ctr">
                     <a:lnL w="6350" cap="flat" cmpd="sng" algn="ctr">
                       <a:solidFill>
                         <a:srgbClr val="D5DEEF"/>
@@ -6767,7 +6660,7 @@
                     <a:bodyPr/>
                     <a:lstStyle/>
                     <a:p>
-                      <a:pPr indent="0" marL="0">
+                      <a:pPr marL="0" indent="0">
                         <a:buNone/>
                       </a:pPr>
                       <a:r>
@@ -6788,7 +6681,7 @@
                       </a:endParaRPr>
                     </a:p>
                   </a:txBody>
-                  <a:tcPr marL="91440" marR="91440" marT="45720" marB="45720" anchor="ctr">
+                  <a:tcPr anchor="ctr">
                     <a:lnL w="6350" cap="flat" cmpd="sng" algn="ctr">
                       <a:solidFill>
                         <a:srgbClr val="D5DEEF"/>
@@ -6830,6 +6723,11 @@
                     </a:solidFill>
                   </a:tcPr>
                 </a:tc>
+                <a:extLst>
+                  <a:ext uri="{0D108BD9-81ED-4DB2-BD59-A6C34878D82A}">
+                    <a16:rowId xmlns:a16="http://schemas.microsoft.com/office/drawing/2014/main" val="10000"/>
+                  </a:ext>
+                </a:extLst>
               </a:tr>
               <a:tr h="396240">
                 <a:tc>
@@ -6837,7 +6735,7 @@
                     <a:bodyPr/>
                     <a:lstStyle/>
                     <a:p>
-                      <a:pPr indent="0" marL="0">
+                      <a:pPr marL="0" indent="0">
                         <a:buNone/>
                       </a:pPr>
                       <a:r>
@@ -6858,7 +6756,7 @@
                       </a:endParaRPr>
                     </a:p>
                   </a:txBody>
-                  <a:tcPr marL="91440" marR="91440" marT="45720" marB="45720" anchor="ctr">
+                  <a:tcPr anchor="ctr">
                     <a:lnL w="6350" cap="flat" cmpd="sng" algn="ctr">
                       <a:solidFill>
                         <a:srgbClr val="D5DEEF"/>
@@ -6902,7 +6800,7 @@
                     <a:bodyPr/>
                     <a:lstStyle/>
                     <a:p>
-                      <a:pPr indent="0" marL="0">
+                      <a:pPr marL="0" indent="0">
                         <a:buNone/>
                       </a:pPr>
                       <a:r>
@@ -6923,7 +6821,7 @@
                       </a:endParaRPr>
                     </a:p>
                   </a:txBody>
-                  <a:tcPr marL="91440" marR="91440" marT="45720" marB="45720" anchor="ctr">
+                  <a:tcPr anchor="ctr">
                     <a:lnL w="6350" cap="flat" cmpd="sng" algn="ctr">
                       <a:solidFill>
                         <a:srgbClr val="D5DEEF"/>
@@ -6962,6 +6860,11 @@
                     </a:lnB>
                   </a:tcPr>
                 </a:tc>
+                <a:extLst>
+                  <a:ext uri="{0D108BD9-81ED-4DB2-BD59-A6C34878D82A}">
+                    <a16:rowId xmlns:a16="http://schemas.microsoft.com/office/drawing/2014/main" val="10001"/>
+                  </a:ext>
+                </a:extLst>
               </a:tr>
               <a:tr h="396240">
                 <a:tc>
@@ -6969,7 +6872,7 @@
                     <a:bodyPr/>
                     <a:lstStyle/>
                     <a:p>
-                      <a:pPr indent="0" marL="0">
+                      <a:pPr marL="0" indent="0">
                         <a:buNone/>
                       </a:pPr>
                       <a:r>
@@ -6990,7 +6893,7 @@
                       </a:endParaRPr>
                     </a:p>
                   </a:txBody>
-                  <a:tcPr marL="91440" marR="91440" marT="45720" marB="45720" anchor="ctr">
+                  <a:tcPr anchor="ctr">
                     <a:lnL w="6350" cap="flat" cmpd="sng" algn="ctr">
                       <a:solidFill>
                         <a:srgbClr val="D5DEEF"/>
@@ -7034,7 +6937,7 @@
                     <a:bodyPr/>
                     <a:lstStyle/>
                     <a:p>
-                      <a:pPr indent="0" marL="0">
+                      <a:pPr marL="0" indent="0">
                         <a:buNone/>
                       </a:pPr>
                       <a:r>
@@ -7055,7 +6958,7 @@
                       </a:endParaRPr>
                     </a:p>
                   </a:txBody>
-                  <a:tcPr marL="91440" marR="91440" marT="45720" marB="45720" anchor="ctr">
+                  <a:tcPr anchor="ctr">
                     <a:lnL w="6350" cap="flat" cmpd="sng" algn="ctr">
                       <a:solidFill>
                         <a:srgbClr val="D5DEEF"/>
@@ -7094,6 +6997,11 @@
                     </a:lnB>
                   </a:tcPr>
                 </a:tc>
+                <a:extLst>
+                  <a:ext uri="{0D108BD9-81ED-4DB2-BD59-A6C34878D82A}">
+                    <a16:rowId xmlns:a16="http://schemas.microsoft.com/office/drawing/2014/main" val="10002"/>
+                  </a:ext>
+                </a:extLst>
               </a:tr>
               <a:tr h="396240">
                 <a:tc>
@@ -7101,7 +7009,7 @@
                     <a:bodyPr/>
                     <a:lstStyle/>
                     <a:p>
-                      <a:pPr indent="0" marL="0">
+                      <a:pPr marL="0" indent="0">
                         <a:buNone/>
                       </a:pPr>
                       <a:r>
@@ -7122,7 +7030,7 @@
                       </a:endParaRPr>
                     </a:p>
                   </a:txBody>
-                  <a:tcPr marL="91440" marR="91440" marT="45720" marB="45720" anchor="ctr">
+                  <a:tcPr anchor="ctr">
                     <a:lnL w="6350" cap="flat" cmpd="sng" algn="ctr">
                       <a:solidFill>
                         <a:srgbClr val="D5DEEF"/>
@@ -7166,7 +7074,7 @@
                     <a:bodyPr/>
                     <a:lstStyle/>
                     <a:p>
-                      <a:pPr indent="0" marL="0">
+                      <a:pPr marL="0" indent="0">
                         <a:buNone/>
                       </a:pPr>
                       <a:r>
@@ -7187,7 +7095,7 @@
                       </a:endParaRPr>
                     </a:p>
                   </a:txBody>
-                  <a:tcPr marL="91440" marR="91440" marT="45720" marB="45720" anchor="ctr">
+                  <a:tcPr anchor="ctr">
                     <a:lnL w="6350" cap="flat" cmpd="sng" algn="ctr">
                       <a:solidFill>
                         <a:srgbClr val="D5DEEF"/>
@@ -7226,6 +7134,11 @@
                     </a:lnB>
                   </a:tcPr>
                 </a:tc>
+                <a:extLst>
+                  <a:ext uri="{0D108BD9-81ED-4DB2-BD59-A6C34878D82A}">
+                    <a16:rowId xmlns:a16="http://schemas.microsoft.com/office/drawing/2014/main" val="10003"/>
+                  </a:ext>
+                </a:extLst>
               </a:tr>
               <a:tr h="396240">
                 <a:tc>
@@ -7233,7 +7146,7 @@
                     <a:bodyPr/>
                     <a:lstStyle/>
                     <a:p>
-                      <a:pPr indent="0" marL="0">
+                      <a:pPr marL="0" indent="0">
                         <a:buNone/>
                       </a:pPr>
                       <a:r>
@@ -7254,7 +7167,7 @@
                       </a:endParaRPr>
                     </a:p>
                   </a:txBody>
-                  <a:tcPr marL="91440" marR="91440" marT="45720" marB="45720" anchor="ctr">
+                  <a:tcPr anchor="ctr">
                     <a:lnL w="6350" cap="flat" cmpd="sng" algn="ctr">
                       <a:solidFill>
                         <a:srgbClr val="D5DEEF"/>
@@ -7298,7 +7211,7 @@
                     <a:bodyPr/>
                     <a:lstStyle/>
                     <a:p>
-                      <a:pPr indent="0" marL="0">
+                      <a:pPr marL="0" indent="0">
                         <a:buNone/>
                       </a:pPr>
                       <a:r>
@@ -7319,7 +7232,7 @@
                       </a:endParaRPr>
                     </a:p>
                   </a:txBody>
-                  <a:tcPr marL="91440" marR="91440" marT="45720" marB="45720" anchor="ctr">
+                  <a:tcPr anchor="ctr">
                     <a:lnL w="6350" cap="flat" cmpd="sng" algn="ctr">
                       <a:solidFill>
                         <a:srgbClr val="D5DEEF"/>
@@ -7358,6 +7271,11 @@
                     </a:lnB>
                   </a:tcPr>
                 </a:tc>
+                <a:extLst>
+                  <a:ext uri="{0D108BD9-81ED-4DB2-BD59-A6C34878D82A}">
+                    <a16:rowId xmlns:a16="http://schemas.microsoft.com/office/drawing/2014/main" val="10004"/>
+                  </a:ext>
+                </a:extLst>
               </a:tr>
               <a:tr h="396240">
                 <a:tc>
@@ -7365,7 +7283,7 @@
                     <a:bodyPr/>
                     <a:lstStyle/>
                     <a:p>
-                      <a:pPr indent="0" marL="0">
+                      <a:pPr marL="0" indent="0">
                         <a:buNone/>
                       </a:pPr>
                       <a:r>
@@ -7386,7 +7304,7 @@
                       </a:endParaRPr>
                     </a:p>
                   </a:txBody>
-                  <a:tcPr marL="91440" marR="91440" marT="45720" marB="45720" anchor="ctr">
+                  <a:tcPr anchor="ctr">
                     <a:lnL w="6350" cap="flat" cmpd="sng" algn="ctr">
                       <a:solidFill>
                         <a:srgbClr val="D5DEEF"/>
@@ -7430,7 +7348,7 @@
                     <a:bodyPr/>
                     <a:lstStyle/>
                     <a:p>
-                      <a:pPr indent="0" marL="0">
+                      <a:pPr marL="0" indent="0">
                         <a:buNone/>
                       </a:pPr>
                       <a:r>
@@ -7451,7 +7369,7 @@
                       </a:endParaRPr>
                     </a:p>
                   </a:txBody>
-                  <a:tcPr marL="91440" marR="91440" marT="45720" marB="45720" anchor="ctr">
+                  <a:tcPr anchor="ctr">
                     <a:lnL w="6350" cap="flat" cmpd="sng" algn="ctr">
                       <a:solidFill>
                         <a:srgbClr val="D5DEEF"/>
@@ -7490,6 +7408,11 @@
                     </a:lnB>
                   </a:tcPr>
                 </a:tc>
+                <a:extLst>
+                  <a:ext uri="{0D108BD9-81ED-4DB2-BD59-A6C34878D82A}">
+                    <a16:rowId xmlns:a16="http://schemas.microsoft.com/office/drawing/2014/main" val="10005"/>
+                  </a:ext>
+                </a:extLst>
               </a:tr>
             </a:tbl>
           </a:graphicData>
@@ -7516,7 +7439,7 @@
           <a:bodyPr wrap="square" lIns="0" tIns="0" rIns="0" bIns="0" rtlCol="0" anchor="t"/>
           <a:lstStyle/>
           <a:p>
-            <a:pPr indent="0" marL="0">
+            <a:pPr marL="0" indent="0">
               <a:buNone/>
             </a:pPr>
             <a:r>
@@ -7530,9 +7453,6 @@
               </a:rPr>
               <a:t>Impact: </a:t>
             </a:r>
-            <a:pPr indent="0" marL="0">
-              <a:buNone/>
-            </a:pPr>
             <a:r>
               <a:rPr lang="en-US" sz="1100" dirty="0">
                 <a:solidFill>
@@ -7569,7 +7489,7 @@
           <a:bodyPr wrap="square" rtlCol="0" anchor="ctr"/>
           <a:lstStyle/>
           <a:p>
-            <a:pPr algn="r" indent="0" marL="0">
+            <a:pPr marL="0" indent="0" algn="r">
               <a:buNone/>
             </a:pPr>
             <a:r>
@@ -7603,6 +7523,7 @@
         <a:solidFill>
           <a:srgbClr val="FFFFFF"/>
         </a:solidFill>
+        <a:effectLst/>
       </p:bgPr>
     </p:bg>
     <p:spTree>
@@ -7640,7 +7561,7 @@
           <a:bodyPr wrap="square" lIns="0" tIns="0" rIns="0" bIns="0" rtlCol="0" anchor="ctr"/>
           <a:lstStyle/>
           <a:p>
-            <a:pPr indent="0" marL="0">
+            <a:pPr marL="0" indent="0">
               <a:buNone/>
             </a:pPr>
             <a:r>
@@ -7679,7 +7600,7 @@
           <a:bodyPr wrap="square" lIns="0" tIns="0" rIns="0" bIns="0" rtlCol="0" anchor="ctr"/>
           <a:lstStyle/>
           <a:p>
-            <a:pPr indent="0" marL="0">
+            <a:pPr marL="0" indent="0">
               <a:buNone/>
             </a:pPr>
             <a:r>
@@ -7691,7 +7612,7 @@
                 <a:ea typeface="Calibri" pitchFamily="34" charset="-122"/>
                 <a:cs typeface="Calibri" pitchFamily="34" charset="-120"/>
               </a:rPr>
-              <a:t>Seasonality-aware imputation — replace, don't delete</a:t>
+              <a:t>Seasonality-aware imputation (replace, don't delete)</a:t>
             </a:r>
             <a:endParaRPr lang="en-US" sz="1300" dirty="0"/>
           </a:p>
@@ -7699,14 +7620,14 @@
       </p:sp>
       <p:pic>
         <p:nvPicPr>
-          <p:cNvPr id="4" name="Image 0" descr="/sessions/relaxed-magical-maxwell/mnt/outputs/figs/07_cleaned.png">    </p:cNvPr>
+          <p:cNvPr id="4" name="Image 0" descr="/sessions/relaxed-magical-maxwell/mnt/outputs/figs/07_cleaned.png"/>
           <p:cNvPicPr>
             <a:picLocks noChangeAspect="1"/>
           </p:cNvPicPr>
           <p:nvPr/>
         </p:nvPicPr>
         <p:blipFill>
-          <a:blip r:embed="rId1"/>
+          <a:blip r:embed="rId3"/>
           <a:stretch>
             <a:fillRect/>
           </a:stretch>
@@ -7742,13 +7663,20 @@
           </a:solidFill>
           <a:ln/>
           <a:effectLst>
-            <a:outerShdw sx="100000" sy="100000" kx="0" ky="0" algn="bl" rotWithShape="0" blurRad="76200" dist="25400" dir="2700000">
+            <a:outerShdw blurRad="76200" dist="25400" dir="2700000" algn="bl" rotWithShape="0">
               <a:srgbClr val="000000">
                 <a:alpha val="13000"/>
               </a:srgbClr>
             </a:outerShdw>
           </a:effectLst>
         </p:spPr>
+        <p:txBody>
+          <a:bodyPr/>
+          <a:lstStyle/>
+          <a:p>
+            <a:endParaRPr lang="en-US"/>
+          </a:p>
+        </p:txBody>
       </p:sp>
       <p:sp>
         <p:nvSpPr>
@@ -7771,7 +7699,7 @@
           <a:bodyPr wrap="square" lIns="0" tIns="0" rIns="0" bIns="0" rtlCol="0" anchor="ctr"/>
           <a:lstStyle/>
           <a:p>
-            <a:pPr indent="0" marL="0">
+            <a:pPr marL="0" indent="0">
               <a:buNone/>
             </a:pPr>
             <a:r>
@@ -7788,7 +7716,7 @@
             <a:endParaRPr lang="en-US" sz="1400" dirty="0"/>
           </a:p>
           <a:p>
-            <a:pPr indent="0" marL="0">
+            <a:pPr marL="0" indent="0">
               <a:buNone/>
             </a:pPr>
             <a:r>
@@ -7805,7 +7733,7 @@
             <a:endParaRPr lang="en-US" sz="1400" dirty="0"/>
           </a:p>
           <a:p>
-            <a:pPr indent="0" marL="0">
+            <a:pPr marL="0" indent="0">
               <a:buNone/>
             </a:pPr>
             <a:r>
@@ -7822,7 +7750,7 @@
             <a:endParaRPr lang="en-US" sz="1400" dirty="0"/>
           </a:p>
           <a:p>
-            <a:pPr indent="0" marL="0">
+            <a:pPr marL="0" indent="0">
               <a:buNone/>
             </a:pPr>
             <a:r>
@@ -7861,13 +7789,20 @@
           </a:solidFill>
           <a:ln/>
           <a:effectLst>
-            <a:outerShdw sx="100000" sy="100000" kx="0" ky="0" algn="bl" rotWithShape="0" blurRad="76200" dist="25400" dir="2700000">
+            <a:outerShdw blurRad="76200" dist="25400" dir="2700000" algn="bl" rotWithShape="0">
               <a:srgbClr val="000000">
                 <a:alpha val="13000"/>
               </a:srgbClr>
             </a:outerShdw>
           </a:effectLst>
         </p:spPr>
+        <p:txBody>
+          <a:bodyPr/>
+          <a:lstStyle/>
+          <a:p>
+            <a:endParaRPr lang="en-US"/>
+          </a:p>
+        </p:txBody>
       </p:sp>
       <p:sp>
         <p:nvSpPr>
@@ -7890,7 +7825,7 @@
           <a:bodyPr wrap="square" lIns="0" tIns="0" rIns="0" bIns="0" rtlCol="0" anchor="ctr"/>
           <a:lstStyle/>
           <a:p>
-            <a:pPr indent="0" marL="0">
+            <a:pPr marL="0" indent="0">
               <a:buNone/>
             </a:pPr>
             <a:r>
@@ -7904,9 +7839,6 @@
               </a:rPr>
               <a:t>Fair evaluation: </a:t>
             </a:r>
-            <a:pPr indent="0" marL="0">
-              <a:buNone/>
-            </a:pPr>
             <a:r>
               <a:rPr lang="en-US" sz="1300" dirty="0">
                 <a:solidFill>
@@ -7916,7 +7848,7 @@
                 <a:ea typeface="Calibri" pitchFamily="34" charset="-122"/>
                 <a:cs typeface="Calibri" pitchFamily="34" charset="-120"/>
               </a:rPr>
-              <a:t>models are re-trained on the cleaned history, but always scored against the original, uncleaned test data — the real future is what we must predict. All 20 anomalies fall before the forecast origin.</a:t>
+              <a:t>models are re-trained on the cleaned history, but always scored against the original, uncleaned test data, the real future is what we must predict. All 20 anomalies fall before the forecast origin.</a:t>
             </a:r>
             <a:endParaRPr lang="en-US" sz="1300" dirty="0"/>
           </a:p>
@@ -7943,7 +7875,7 @@
           <a:bodyPr wrap="square" rtlCol="0" anchor="ctr"/>
           <a:lstStyle/>
           <a:p>
-            <a:pPr algn="r" indent="0" marL="0">
+            <a:pPr marL="0" indent="0" algn="r">
               <a:buNone/>
             </a:pPr>
             <a:r>
@@ -7977,6 +7909,7 @@
         <a:solidFill>
           <a:srgbClr val="FFFFFF"/>
         </a:solidFill>
+        <a:effectLst/>
       </p:bgPr>
     </p:bg>
     <p:spTree>
@@ -8014,7 +7947,7 @@
           <a:bodyPr wrap="square" lIns="0" tIns="0" rIns="0" bIns="0" rtlCol="0" anchor="ctr"/>
           <a:lstStyle/>
           <a:p>
-            <a:pPr indent="0" marL="0">
+            <a:pPr marL="0" indent="0">
               <a:buNone/>
             </a:pPr>
             <a:r>
@@ -8053,7 +7986,7 @@
           <a:bodyPr wrap="square" lIns="0" tIns="0" rIns="0" bIns="0" rtlCol="0" anchor="ctr"/>
           <a:lstStyle/>
           <a:p>
-            <a:pPr indent="0" marL="0">
+            <a:pPr marL="0" indent="0">
               <a:buNone/>
             </a:pPr>
             <a:r>
@@ -8073,7 +8006,7 @@
       </p:sp>
       <p:graphicFrame>
         <p:nvGraphicFramePr>
-          <p:cNvPr id="4" name="Chart 0" descr=""/>
+          <p:cNvPr id="4" name="Chart 0"/>
           <p:cNvGraphicFramePr/>
           <p:nvPr/>
         </p:nvGraphicFramePr>
@@ -8081,9 +8014,9 @@
           <a:off x="457200" y="1234440"/>
           <a:ext cx="4937760" cy="3200400"/>
         </p:xfrm>
-        <a:graphic xmlns:a="http://schemas.openxmlformats.org/drawingml/2006/main">
+        <a:graphic>
           <a:graphicData uri="http://schemas.openxmlformats.org/drawingml/2006/chart">
-            <c:chart xmlns:c="http://schemas.openxmlformats.org/drawingml/2006/chart" r:id="rId1"/>
+            <c:chart xmlns:c="http://schemas.openxmlformats.org/drawingml/2006/chart" xmlns:r="http://schemas.openxmlformats.org/officeDocument/2006/relationships" r:id="rId3"/>
           </a:graphicData>
         </a:graphic>
       </p:graphicFrame>
@@ -8108,13 +8041,20 @@
           </a:solidFill>
           <a:ln/>
           <a:effectLst>
-            <a:outerShdw sx="100000" sy="100000" kx="0" ky="0" algn="bl" rotWithShape="0" blurRad="76200" dist="25400" dir="2700000">
+            <a:outerShdw blurRad="76200" dist="25400" dir="2700000" algn="bl" rotWithShape="0">
               <a:srgbClr val="000000">
                 <a:alpha val="13000"/>
               </a:srgbClr>
             </a:outerShdw>
           </a:effectLst>
         </p:spPr>
+        <p:txBody>
+          <a:bodyPr/>
+          <a:lstStyle/>
+          <a:p>
+            <a:endParaRPr lang="en-US"/>
+          </a:p>
+        </p:txBody>
       </p:sp>
       <p:sp>
         <p:nvSpPr>
@@ -8137,7 +8077,7 @@
           <a:bodyPr wrap="square" lIns="0" tIns="0" rIns="0" bIns="0" rtlCol="0" anchor="t"/>
           <a:lstStyle/>
           <a:p>
-            <a:pPr indent="0" marL="0">
+            <a:pPr marL="0" indent="0">
               <a:buNone/>
             </a:pPr>
             <a:r>
@@ -8154,7 +8094,7 @@
             <a:endParaRPr lang="en-US" sz="1600" dirty="0"/>
           </a:p>
           <a:p>
-            <a:pPr indent="0" marL="0">
+            <a:pPr marL="0" indent="0">
               <a:buNone/>
             </a:pPr>
             <a:r>
@@ -8193,13 +8133,20 @@
           </a:solidFill>
           <a:ln/>
           <a:effectLst>
-            <a:outerShdw sx="100000" sy="100000" kx="0" ky="0" algn="bl" rotWithShape="0" blurRad="76200" dist="25400" dir="2700000">
+            <a:outerShdw blurRad="76200" dist="25400" dir="2700000" algn="bl" rotWithShape="0">
               <a:srgbClr val="000000">
                 <a:alpha val="13000"/>
               </a:srgbClr>
             </a:outerShdw>
           </a:effectLst>
         </p:spPr>
+        <p:txBody>
+          <a:bodyPr/>
+          <a:lstStyle/>
+          <a:p>
+            <a:endParaRPr lang="en-US"/>
+          </a:p>
+        </p:txBody>
       </p:sp>
       <p:sp>
         <p:nvSpPr>
@@ -8222,7 +8169,7 @@
           <a:bodyPr wrap="square" lIns="0" tIns="0" rIns="0" bIns="0" rtlCol="0" anchor="t"/>
           <a:lstStyle/>
           <a:p>
-            <a:pPr indent="0" marL="0">
+            <a:pPr marL="0" indent="0">
               <a:buNone/>
             </a:pPr>
             <a:r>
@@ -8239,7 +8186,7 @@
             <a:endParaRPr lang="en-US" sz="1600" dirty="0"/>
           </a:p>
           <a:p>
-            <a:pPr indent="0" marL="0">
+            <a:pPr marL="0" indent="0">
               <a:buNone/>
             </a:pPr>
             <a:r>
@@ -8251,7 +8198,7 @@
                 <a:ea typeface="Calibri" pitchFamily="34" charset="-122"/>
                 <a:cs typeface="Calibri" pitchFamily="34" charset="-120"/>
               </a:rPr>
-              <a:t>12.65 → 16.06. SARIMA was already robust — imputing spikes it had absorbed altered the variance structure, so cleaning was unnecessary here.</a:t>
+              <a:t>12.65 → 16.06. SARIMA was already robust, imputing spikes it had absorbed altered the variance structure, so cleaning was unnecessary here.</a:t>
             </a:r>
             <a:endParaRPr lang="en-US" sz="1600" dirty="0"/>
           </a:p>
@@ -8278,7 +8225,7 @@
           <a:bodyPr wrap="square" rtlCol="0" anchor="ctr"/>
           <a:lstStyle/>
           <a:p>
-            <a:pPr algn="r" indent="0" marL="0">
+            <a:pPr marL="0" indent="0" algn="r">
               <a:buNone/>
             </a:pPr>
             <a:r>
@@ -8597,4 +8544,319 @@
     </a:ext>
   </a:extLst>
 </a:theme>
+</file>
+
+<file path=ppt/theme/theme2.xml><?xml version="1.0" encoding="utf-8"?>
+<a:theme xmlns:a="http://schemas.openxmlformats.org/drawingml/2006/main" name="Office Theme">
+  <a:themeElements>
+    <a:clrScheme name="Office">
+      <a:dk1>
+        <a:sysClr val="windowText" lastClr="000000"/>
+      </a:dk1>
+      <a:lt1>
+        <a:sysClr val="window" lastClr="FFFFFF"/>
+      </a:lt1>
+      <a:dk2>
+        <a:srgbClr val="0E2841"/>
+      </a:dk2>
+      <a:lt2>
+        <a:srgbClr val="E8E8E8"/>
+      </a:lt2>
+      <a:accent1>
+        <a:srgbClr val="156082"/>
+      </a:accent1>
+      <a:accent2>
+        <a:srgbClr val="E97132"/>
+      </a:accent2>
+      <a:accent3>
+        <a:srgbClr val="196B24"/>
+      </a:accent3>
+      <a:accent4>
+        <a:srgbClr val="0F9ED5"/>
+      </a:accent4>
+      <a:accent5>
+        <a:srgbClr val="A02B93"/>
+      </a:accent5>
+      <a:accent6>
+        <a:srgbClr val="4EA72E"/>
+      </a:accent6>
+      <a:hlink>
+        <a:srgbClr val="467886"/>
+      </a:hlink>
+      <a:folHlink>
+        <a:srgbClr val="96607D"/>
+      </a:folHlink>
+    </a:clrScheme>
+    <a:fontScheme name="Office">
+      <a:majorFont>
+        <a:latin typeface="Aptos Display" panose="02110004020202020204"/>
+        <a:ea typeface=""/>
+        <a:cs typeface=""/>
+        <a:font script="Jpan" typeface="游ゴシック Light"/>
+        <a:font script="Hang" typeface="맑은 고딕"/>
+        <a:font script="Hans" typeface="等线 Light"/>
+        <a:font script="Hant" typeface="新細明體"/>
+        <a:font script="Arab" typeface="Times New Roman"/>
+        <a:font script="Hebr" typeface="Times New Roman"/>
+        <a:font script="Thai" typeface="Angsana New"/>
+        <a:font script="Ethi" typeface="Nyala"/>
+        <a:font script="Beng" typeface="Vrinda"/>
+        <a:font script="Gujr" typeface="Shruti"/>
+        <a:font script="Khmr" typeface="MoolBoran"/>
+        <a:font script="Knda" typeface="Tunga"/>
+        <a:font script="Guru" typeface="Raavi"/>
+        <a:font script="Cans" typeface="Euphemia"/>
+        <a:font script="Cher" typeface="Plantagenet Cherokee"/>
+        <a:font script="Yiii" typeface="Microsoft Yi Baiti"/>
+        <a:font script="Tibt" typeface="Microsoft Himalaya"/>
+        <a:font script="Thaa" typeface="MV Boli"/>
+        <a:font script="Deva" typeface="Mangal"/>
+        <a:font script="Telu" typeface="Gautami"/>
+        <a:font script="Taml" typeface="Latha"/>
+        <a:font script="Syrc" typeface="Estrangelo Edessa"/>
+        <a:font script="Orya" typeface="Kalinga"/>
+        <a:font script="Mlym" typeface="Kartika"/>
+        <a:font script="Laoo" typeface="DokChampa"/>
+        <a:font script="Sinh" typeface="Iskoola Pota"/>
+        <a:font script="Mong" typeface="Mongolian Baiti"/>
+        <a:font script="Viet" typeface="Times New Roman"/>
+        <a:font script="Uigh" typeface="Microsoft Uighur"/>
+        <a:font script="Geor" typeface="Sylfaen"/>
+        <a:font script="Armn" typeface="Arial"/>
+        <a:font script="Bugi" typeface="Leelawadee UI"/>
+        <a:font script="Bopo" typeface="Microsoft JhengHei"/>
+        <a:font script="Java" typeface="Javanese Text"/>
+        <a:font script="Lisu" typeface="Segoe UI"/>
+        <a:font script="Mymr" typeface="Myanmar Text"/>
+        <a:font script="Nkoo" typeface="Ebrima"/>
+        <a:font script="Olck" typeface="Nirmala UI"/>
+        <a:font script="Osma" typeface="Ebrima"/>
+        <a:font script="Phag" typeface="Phagspa"/>
+        <a:font script="Syrn" typeface="Estrangelo Edessa"/>
+        <a:font script="Syrj" typeface="Estrangelo Edessa"/>
+        <a:font script="Syre" typeface="Estrangelo Edessa"/>
+        <a:font script="Sora" typeface="Nirmala UI"/>
+        <a:font script="Tale" typeface="Microsoft Tai Le"/>
+        <a:font script="Talu" typeface="Microsoft New Tai Lue"/>
+        <a:font script="Tfng" typeface="Ebrima"/>
+      </a:majorFont>
+      <a:minorFont>
+        <a:latin typeface="Aptos" panose="02110004020202020204"/>
+        <a:ea typeface=""/>
+        <a:cs typeface=""/>
+        <a:font script="Jpan" typeface="游ゴシック"/>
+        <a:font script="Hang" typeface="맑은 고딕"/>
+        <a:font script="Hans" typeface="等线"/>
+        <a:font script="Hant" typeface="新細明體"/>
+        <a:font script="Arab" typeface="Arial"/>
+        <a:font script="Hebr" typeface="Arial"/>
+        <a:font script="Thai" typeface="Cordia New"/>
+        <a:font script="Ethi" typeface="Nyala"/>
+        <a:font script="Beng" typeface="Vrinda"/>
+        <a:font script="Gujr" typeface="Shruti"/>
+        <a:font script="Khmr" typeface="DaunPenh"/>
+        <a:font script="Knda" typeface="Tunga"/>
+        <a:font script="Guru" typeface="Raavi"/>
+        <a:font script="Cans" typeface="Euphemia"/>
+        <a:font script="Cher" typeface="Plantagenet Cherokee"/>
+        <a:font script="Yiii" typeface="Microsoft Yi Baiti"/>
+        <a:font script="Tibt" typeface="Microsoft Himalaya"/>
+        <a:font script="Thaa" typeface="MV Boli"/>
+        <a:font script="Deva" typeface="Mangal"/>
+        <a:font script="Telu" typeface="Gautami"/>
+        <a:font script="Taml" typeface="Latha"/>
+        <a:font script="Syrc" typeface="Estrangelo Edessa"/>
+        <a:font script="Orya" typeface="Kalinga"/>
+        <a:font script="Mlym" typeface="Kartika"/>
+        <a:font script="Laoo" typeface="DokChampa"/>
+        <a:font script="Sinh" typeface="Iskoola Pota"/>
+        <a:font script="Mong" typeface="Mongolian Baiti"/>
+        <a:font script="Viet" typeface="Arial"/>
+        <a:font script="Uigh" typeface="Microsoft Uighur"/>
+        <a:font script="Geor" typeface="Sylfaen"/>
+        <a:font script="Armn" typeface="Arial"/>
+        <a:font script="Bugi" typeface="Leelawadee UI"/>
+        <a:font script="Bopo" typeface="Microsoft JhengHei"/>
+        <a:font script="Java" typeface="Javanese Text"/>
+        <a:font script="Lisu" typeface="Segoe UI"/>
+        <a:font script="Mymr" typeface="Myanmar Text"/>
+        <a:font script="Nkoo" typeface="Ebrima"/>
+        <a:font script="Olck" typeface="Nirmala UI"/>
+        <a:font script="Osma" typeface="Ebrima"/>
+        <a:font script="Phag" typeface="Phagspa"/>
+        <a:font script="Syrn" typeface="Estrangelo Edessa"/>
+        <a:font script="Syrj" typeface="Estrangelo Edessa"/>
+        <a:font script="Syre" typeface="Estrangelo Edessa"/>
+        <a:font script="Sora" typeface="Nirmala UI"/>
+        <a:font script="Tale" typeface="Microsoft Tai Le"/>
+        <a:font script="Talu" typeface="Microsoft New Tai Lue"/>
+        <a:font script="Tfng" typeface="Ebrima"/>
+      </a:minorFont>
+    </a:fontScheme>
+    <a:fmtScheme name="Office">
+      <a:fillStyleLst>
+        <a:solidFill>
+          <a:schemeClr val="phClr"/>
+        </a:solidFill>
+        <a:gradFill rotWithShape="1">
+          <a:gsLst>
+            <a:gs pos="0">
+              <a:schemeClr val="phClr">
+                <a:lumMod val="110000"/>
+                <a:satMod val="105000"/>
+                <a:tint val="67000"/>
+              </a:schemeClr>
+            </a:gs>
+            <a:gs pos="50000">
+              <a:schemeClr val="phClr">
+                <a:lumMod val="105000"/>
+                <a:satMod val="103000"/>
+                <a:tint val="73000"/>
+              </a:schemeClr>
+            </a:gs>
+            <a:gs pos="100000">
+              <a:schemeClr val="phClr">
+                <a:lumMod val="105000"/>
+                <a:satMod val="109000"/>
+                <a:tint val="81000"/>
+              </a:schemeClr>
+            </a:gs>
+          </a:gsLst>
+          <a:lin ang="5400000" scaled="0"/>
+        </a:gradFill>
+        <a:gradFill rotWithShape="1">
+          <a:gsLst>
+            <a:gs pos="0">
+              <a:schemeClr val="phClr">
+                <a:satMod val="103000"/>
+                <a:lumMod val="102000"/>
+                <a:tint val="94000"/>
+              </a:schemeClr>
+            </a:gs>
+            <a:gs pos="50000">
+              <a:schemeClr val="phClr">
+                <a:satMod val="110000"/>
+                <a:lumMod val="100000"/>
+                <a:shade val="100000"/>
+              </a:schemeClr>
+            </a:gs>
+            <a:gs pos="100000">
+              <a:schemeClr val="phClr">
+                <a:lumMod val="99000"/>
+                <a:satMod val="120000"/>
+                <a:shade val="78000"/>
+              </a:schemeClr>
+            </a:gs>
+          </a:gsLst>
+          <a:lin ang="5400000" scaled="0"/>
+        </a:gradFill>
+      </a:fillStyleLst>
+      <a:lnStyleLst>
+        <a:ln w="12700" cap="flat" cmpd="sng" algn="ctr">
+          <a:solidFill>
+            <a:schemeClr val="phClr"/>
+          </a:solidFill>
+          <a:prstDash val="solid"/>
+          <a:miter lim="800000"/>
+        </a:ln>
+        <a:ln w="19050" cap="flat" cmpd="sng" algn="ctr">
+          <a:solidFill>
+            <a:schemeClr val="phClr"/>
+          </a:solidFill>
+          <a:prstDash val="solid"/>
+          <a:miter lim="800000"/>
+        </a:ln>
+        <a:ln w="25400" cap="flat" cmpd="sng" algn="ctr">
+          <a:solidFill>
+            <a:schemeClr val="phClr"/>
+          </a:solidFill>
+          <a:prstDash val="solid"/>
+          <a:miter lim="800000"/>
+        </a:ln>
+      </a:lnStyleLst>
+      <a:effectStyleLst>
+        <a:effectStyle>
+          <a:effectLst/>
+        </a:effectStyle>
+        <a:effectStyle>
+          <a:effectLst/>
+        </a:effectStyle>
+        <a:effectStyle>
+          <a:effectLst>
+            <a:outerShdw blurRad="57150" dist="19050" dir="5400000" algn="ctr" rotWithShape="0">
+              <a:srgbClr val="000000">
+                <a:alpha val="63000"/>
+              </a:srgbClr>
+            </a:outerShdw>
+          </a:effectLst>
+        </a:effectStyle>
+      </a:effectStyleLst>
+      <a:bgFillStyleLst>
+        <a:solidFill>
+          <a:schemeClr val="phClr"/>
+        </a:solidFill>
+        <a:solidFill>
+          <a:schemeClr val="phClr">
+            <a:tint val="95000"/>
+            <a:satMod val="170000"/>
+          </a:schemeClr>
+        </a:solidFill>
+        <a:gradFill rotWithShape="1">
+          <a:gsLst>
+            <a:gs pos="0">
+              <a:schemeClr val="phClr">
+                <a:tint val="93000"/>
+                <a:satMod val="150000"/>
+                <a:shade val="98000"/>
+                <a:lumMod val="102000"/>
+              </a:schemeClr>
+            </a:gs>
+            <a:gs pos="50000">
+              <a:schemeClr val="phClr">
+                <a:tint val="98000"/>
+                <a:satMod val="130000"/>
+                <a:shade val="90000"/>
+                <a:lumMod val="103000"/>
+              </a:schemeClr>
+            </a:gs>
+            <a:gs pos="100000">
+              <a:schemeClr val="phClr">
+                <a:shade val="63000"/>
+                <a:satMod val="120000"/>
+              </a:schemeClr>
+            </a:gs>
+          </a:gsLst>
+          <a:lin ang="5400000" scaled="0"/>
+        </a:gradFill>
+      </a:bgFillStyleLst>
+    </a:fmtScheme>
+  </a:themeElements>
+  <a:objectDefaults>
+    <a:lnDef>
+      <a:spPr/>
+      <a:bodyPr/>
+      <a:lstStyle/>
+      <a:style>
+        <a:lnRef idx="2">
+          <a:schemeClr val="accent1"/>
+        </a:lnRef>
+        <a:fillRef idx="0">
+          <a:schemeClr val="accent1"/>
+        </a:fillRef>
+        <a:effectRef idx="1">
+          <a:schemeClr val="accent1"/>
+        </a:effectRef>
+        <a:fontRef idx="minor">
+          <a:schemeClr val="tx1"/>
+        </a:fontRef>
+      </a:style>
+    </a:lnDef>
+  </a:objectDefaults>
+  <a:extraClrSchemeLst/>
+  <a:extLst>
+    <a:ext uri="{05A4C25C-085E-4340-85A3-A5531E510DB2}">
+      <thm15:themeFamily xmlns:thm15="http://schemas.microsoft.com/office/thememl/2012/main" name="Office Theme" id="{2E142A2C-CD16-42D6-873A-C26D2A0506FA}" vid="{1BDDFF52-6CD6-40A5-AB3C-68EB2F1E4D0A}"/>
+    </a:ext>
+  </a:extLst>
+</a:theme>
 </file>